--- a/icons.pptx
+++ b/icons.pptx
@@ -6,6 +6,7 @@
   </p:sldMasterIdLst>
   <p:sldIdLst>
     <p:sldId id="256" r:id="rId2"/>
+    <p:sldId id="257" r:id="rId3"/>
   </p:sldIdLst>
   <p:sldSz cx="12192000" cy="6858000"/>
   <p:notesSz cx="6858000" cy="9144000"/>
@@ -5723,7 +5724,7 @@
         </p:nvSpPr>
         <p:spPr>
           <a:xfrm>
-            <a:off x="6642394" y="1580549"/>
+            <a:off x="6629053" y="1126116"/>
             <a:ext cx="1859903" cy="521638"/>
           </a:xfrm>
           <a:custGeom>
@@ -5848,7 +5849,7 @@
         </p:nvSpPr>
         <p:spPr>
           <a:xfrm>
-            <a:off x="8037711" y="1579233"/>
+            <a:off x="8024370" y="1124800"/>
             <a:ext cx="1082547" cy="521638"/>
           </a:xfrm>
           <a:custGeom>
@@ -5965,7 +5966,7 @@
         </p:nvSpPr>
         <p:spPr>
           <a:xfrm>
-            <a:off x="6664082" y="1655386"/>
+            <a:off x="6650741" y="1200953"/>
             <a:ext cx="1386328" cy="369332"/>
           </a:xfrm>
           <a:prstGeom prst="rect">
@@ -6025,7 +6026,7 @@
         </p:nvSpPr>
         <p:spPr>
           <a:xfrm>
-            <a:off x="8348153" y="1724636"/>
+            <a:off x="8334812" y="1270203"/>
             <a:ext cx="920537" cy="230832"/>
           </a:xfrm>
           <a:prstGeom prst="rect">
@@ -7671,22 +7672,15 @@
           <a:lstStyle/>
           <a:p>
             <a:r>
-              <a:rPr lang="en-US" altLang="zh-CN" sz="900" b="1" dirty="0">
+              <a:rPr lang="zh-CN" altLang="en-US" sz="900" b="1" dirty="0">
                 <a:solidFill>
                   <a:schemeClr val="bg1"/>
                 </a:solidFill>
                 <a:latin typeface="Comic Sans MS" panose="030F0702030302020204" pitchFamily="66" charset="0"/>
                 <a:cs typeface="Times New Roman" panose="02020603050405020304" pitchFamily="18" charset="0"/>
               </a:rPr>
-              <a:t>More stat increases</a:t>
+              <a:t>多项能力提升</a:t>
             </a:r>
-            <a:endParaRPr lang="zh-CN" altLang="en-US" sz="900" b="1" dirty="0">
-              <a:solidFill>
-                <a:schemeClr val="bg1"/>
-              </a:solidFill>
-              <a:latin typeface="Comic Sans MS" panose="030F0702030302020204" pitchFamily="66" charset="0"/>
-              <a:cs typeface="Times New Roman" panose="02020603050405020304" pitchFamily="18" charset="0"/>
-            </a:endParaRPr>
           </a:p>
         </p:txBody>
       </p:sp>
@@ -8009,22 +8003,15 @@
           <a:lstStyle/>
           <a:p>
             <a:r>
-              <a:rPr lang="en-US" altLang="zh-CN" sz="900" b="1" dirty="0">
+              <a:rPr lang="zh-CN" altLang="en-US" sz="900" b="1" dirty="0">
                 <a:solidFill>
                   <a:schemeClr val="bg1"/>
                 </a:solidFill>
                 <a:latin typeface="Comic Sans MS" panose="030F0702030302020204" pitchFamily="66" charset="0"/>
                 <a:cs typeface="Times New Roman" panose="02020603050405020304" pitchFamily="18" charset="0"/>
               </a:rPr>
-              <a:t>More stat decreases</a:t>
+              <a:t>多项能力下降</a:t>
             </a:r>
-            <a:endParaRPr lang="zh-CN" altLang="en-US" sz="900" b="1" dirty="0">
-              <a:solidFill>
-                <a:schemeClr val="bg1"/>
-              </a:solidFill>
-              <a:latin typeface="Comic Sans MS" panose="030F0702030302020204" pitchFamily="66" charset="0"/>
-              <a:cs typeface="Times New Roman" panose="02020603050405020304" pitchFamily="18" charset="0"/>
-            </a:endParaRPr>
           </a:p>
         </p:txBody>
       </p:sp>
@@ -8090,7 +8077,7 @@
         </p:nvSpPr>
         <p:spPr>
           <a:xfrm>
-            <a:off x="6544018" y="3409056"/>
+            <a:off x="6629053" y="1714372"/>
             <a:ext cx="1859903" cy="521638"/>
           </a:xfrm>
           <a:custGeom>
@@ -8215,7 +8202,7 @@
         </p:nvSpPr>
         <p:spPr>
           <a:xfrm>
-            <a:off x="7939335" y="3409056"/>
+            <a:off x="8024370" y="1714372"/>
             <a:ext cx="1082547" cy="521638"/>
           </a:xfrm>
           <a:custGeom>
@@ -8332,7 +8319,7 @@
         </p:nvSpPr>
         <p:spPr>
           <a:xfrm>
-            <a:off x="6565706" y="3485209"/>
+            <a:off x="6650741" y="1790525"/>
             <a:ext cx="1386328" cy="369332"/>
           </a:xfrm>
           <a:prstGeom prst="rect">
@@ -8392,7 +8379,7 @@
         </p:nvSpPr>
         <p:spPr>
           <a:xfrm>
-            <a:off x="8249777" y="3554459"/>
+            <a:off x="8334812" y="1859775"/>
             <a:ext cx="920537" cy="230832"/>
           </a:xfrm>
           <a:prstGeom prst="rect">
@@ -8440,7 +8427,7 @@
         </p:nvSpPr>
         <p:spPr>
           <a:xfrm>
-            <a:off x="6565706" y="4455693"/>
+            <a:off x="6629312" y="2318885"/>
             <a:ext cx="1859903" cy="521638"/>
           </a:xfrm>
           <a:custGeom>
@@ -8565,7 +8552,7 @@
         </p:nvSpPr>
         <p:spPr>
           <a:xfrm>
-            <a:off x="7961023" y="4454377"/>
+            <a:off x="8024629" y="2317569"/>
             <a:ext cx="1082547" cy="521638"/>
           </a:xfrm>
           <a:custGeom>
@@ -8682,7 +8669,7 @@
         </p:nvSpPr>
         <p:spPr>
           <a:xfrm>
-            <a:off x="6587394" y="4530530"/>
+            <a:off x="6651000" y="2393722"/>
             <a:ext cx="1386328" cy="369332"/>
           </a:xfrm>
           <a:prstGeom prst="rect">
@@ -8742,7 +8729,7 @@
         </p:nvSpPr>
         <p:spPr>
           <a:xfrm>
-            <a:off x="8271465" y="4599780"/>
+            <a:off x="8335071" y="2462972"/>
             <a:ext cx="920537" cy="230832"/>
           </a:xfrm>
           <a:prstGeom prst="rect">
@@ -8776,10 +8763,2283 @@
           </a:p>
         </p:txBody>
       </p:sp>
+      <p:sp>
+        <p:nvSpPr>
+          <p:cNvPr id="134" name="任意多边形: 形状 133">
+            <a:extLst>
+              <a:ext uri="{FF2B5EF4-FFF2-40B4-BE49-F238E27FC236}">
+                <a16:creationId xmlns:a16="http://schemas.microsoft.com/office/drawing/2014/main" id="{074DE842-0A5E-8E01-BC91-8D0B2B66F65D}"/>
+              </a:ext>
+            </a:extLst>
+          </p:cNvPr>
+          <p:cNvSpPr/>
+          <p:nvPr/>
+        </p:nvSpPr>
+        <p:spPr>
+          <a:xfrm>
+            <a:off x="644376" y="5213424"/>
+            <a:ext cx="1859903" cy="521638"/>
+          </a:xfrm>
+          <a:custGeom>
+            <a:avLst/>
+            <a:gdLst>
+              <a:gd name="csX0" fmla="*/ 86941 w 1405771"/>
+              <a:gd name="csY0" fmla="*/ 0 h 521638"/>
+              <a:gd name="csX1" fmla="*/ 1405771 w 1405771"/>
+              <a:gd name="csY1" fmla="*/ 0 h 521638"/>
+              <a:gd name="csX2" fmla="*/ 1059236 w 1405771"/>
+              <a:gd name="csY2" fmla="*/ 521638 h 521638"/>
+              <a:gd name="csX3" fmla="*/ 86941 w 1405771"/>
+              <a:gd name="csY3" fmla="*/ 521638 h 521638"/>
+              <a:gd name="csX4" fmla="*/ 0 w 1405771"/>
+              <a:gd name="csY4" fmla="*/ 434697 h 521638"/>
+              <a:gd name="csX5" fmla="*/ 0 w 1405771"/>
+              <a:gd name="csY5" fmla="*/ 86941 h 521638"/>
+              <a:gd name="csX6" fmla="*/ 86941 w 1405771"/>
+              <a:gd name="csY6" fmla="*/ 0 h 521638"/>
+            </a:gdLst>
+            <a:ahLst/>
+            <a:cxnLst>
+              <a:cxn ang="0">
+                <a:pos x="csX0" y="csY0"/>
+              </a:cxn>
+              <a:cxn ang="0">
+                <a:pos x="csX1" y="csY1"/>
+              </a:cxn>
+              <a:cxn ang="0">
+                <a:pos x="csX2" y="csY2"/>
+              </a:cxn>
+              <a:cxn ang="0">
+                <a:pos x="csX3" y="csY3"/>
+              </a:cxn>
+              <a:cxn ang="0">
+                <a:pos x="csX4" y="csY4"/>
+              </a:cxn>
+              <a:cxn ang="0">
+                <a:pos x="csX5" y="csY5"/>
+              </a:cxn>
+              <a:cxn ang="0">
+                <a:pos x="csX6" y="csY6"/>
+              </a:cxn>
+            </a:cxnLst>
+            <a:rect l="l" t="t" r="r" b="b"/>
+            <a:pathLst>
+              <a:path w="1405771" h="521638">
+                <a:moveTo>
+                  <a:pt x="86941" y="0"/>
+                </a:moveTo>
+                <a:lnTo>
+                  <a:pt x="1405771" y="0"/>
+                </a:lnTo>
+                <a:lnTo>
+                  <a:pt x="1059236" y="521638"/>
+                </a:lnTo>
+                <a:lnTo>
+                  <a:pt x="86941" y="521638"/>
+                </a:lnTo>
+                <a:cubicBezTo>
+                  <a:pt x="38925" y="521638"/>
+                  <a:pt x="0" y="482713"/>
+                  <a:pt x="0" y="434697"/>
+                </a:cubicBezTo>
+                <a:lnTo>
+                  <a:pt x="0" y="86941"/>
+                </a:lnTo>
+                <a:cubicBezTo>
+                  <a:pt x="0" y="38925"/>
+                  <a:pt x="38925" y="0"/>
+                  <a:pt x="86941" y="0"/>
+                </a:cubicBezTo>
+                <a:close/>
+              </a:path>
+            </a:pathLst>
+          </a:custGeom>
+          <a:solidFill>
+            <a:srgbClr val="F9AE07"/>
+          </a:solidFill>
+          <a:ln>
+            <a:noFill/>
+          </a:ln>
+        </p:spPr>
+        <p:style>
+          <a:lnRef idx="2">
+            <a:schemeClr val="accent4">
+              <a:shade val="15000"/>
+            </a:schemeClr>
+          </a:lnRef>
+          <a:fillRef idx="1">
+            <a:schemeClr val="accent4"/>
+          </a:fillRef>
+          <a:effectRef idx="0">
+            <a:schemeClr val="accent4"/>
+          </a:effectRef>
+          <a:fontRef idx="minor">
+            <a:schemeClr val="lt1"/>
+          </a:fontRef>
+        </p:style>
+        <p:txBody>
+          <a:bodyPr wrap="square" rtlCol="0" anchor="ctr">
+            <a:noAutofit/>
+          </a:bodyPr>
+          <a:lstStyle/>
+          <a:p>
+            <a:pPr algn="ctr"/>
+            <a:endParaRPr lang="zh-CN" altLang="en-US" dirty="0"/>
+          </a:p>
+        </p:txBody>
+      </p:sp>
+      <p:sp>
+        <p:nvSpPr>
+          <p:cNvPr id="135" name="任意多边形: 形状 134">
+            <a:extLst>
+              <a:ext uri="{FF2B5EF4-FFF2-40B4-BE49-F238E27FC236}">
+                <a16:creationId xmlns:a16="http://schemas.microsoft.com/office/drawing/2014/main" id="{FCA28441-C9AA-A355-2587-988C6A21C7B1}"/>
+              </a:ext>
+            </a:extLst>
+          </p:cNvPr>
+          <p:cNvSpPr/>
+          <p:nvPr/>
+        </p:nvSpPr>
+        <p:spPr>
+          <a:xfrm>
+            <a:off x="2043926" y="5213424"/>
+            <a:ext cx="1082547" cy="521638"/>
+          </a:xfrm>
+          <a:custGeom>
+            <a:avLst/>
+            <a:gdLst>
+              <a:gd name="csX0" fmla="*/ 346535 w 1082547"/>
+              <a:gd name="csY0" fmla="*/ 0 h 521638"/>
+              <a:gd name="csX1" fmla="*/ 995606 w 1082547"/>
+              <a:gd name="csY1" fmla="*/ 0 h 521638"/>
+              <a:gd name="csX2" fmla="*/ 1082547 w 1082547"/>
+              <a:gd name="csY2" fmla="*/ 86941 h 521638"/>
+              <a:gd name="csX3" fmla="*/ 1082547 w 1082547"/>
+              <a:gd name="csY3" fmla="*/ 434697 h 521638"/>
+              <a:gd name="csX4" fmla="*/ 995606 w 1082547"/>
+              <a:gd name="csY4" fmla="*/ 521638 h 521638"/>
+              <a:gd name="csX5" fmla="*/ 0 w 1082547"/>
+              <a:gd name="csY5" fmla="*/ 521638 h 521638"/>
+            </a:gdLst>
+            <a:ahLst/>
+            <a:cxnLst>
+              <a:cxn ang="0">
+                <a:pos x="csX0" y="csY0"/>
+              </a:cxn>
+              <a:cxn ang="0">
+                <a:pos x="csX1" y="csY1"/>
+              </a:cxn>
+              <a:cxn ang="0">
+                <a:pos x="csX2" y="csY2"/>
+              </a:cxn>
+              <a:cxn ang="0">
+                <a:pos x="csX3" y="csY3"/>
+              </a:cxn>
+              <a:cxn ang="0">
+                <a:pos x="csX4" y="csY4"/>
+              </a:cxn>
+              <a:cxn ang="0">
+                <a:pos x="csX5" y="csY5"/>
+              </a:cxn>
+            </a:cxnLst>
+            <a:rect l="l" t="t" r="r" b="b"/>
+            <a:pathLst>
+              <a:path w="1082547" h="521638">
+                <a:moveTo>
+                  <a:pt x="346535" y="0"/>
+                </a:moveTo>
+                <a:lnTo>
+                  <a:pt x="995606" y="0"/>
+                </a:lnTo>
+                <a:cubicBezTo>
+                  <a:pt x="1043622" y="0"/>
+                  <a:pt x="1082547" y="38925"/>
+                  <a:pt x="1082547" y="86941"/>
+                </a:cubicBezTo>
+                <a:lnTo>
+                  <a:pt x="1082547" y="434697"/>
+                </a:lnTo>
+                <a:cubicBezTo>
+                  <a:pt x="1082547" y="482713"/>
+                  <a:pt x="1043622" y="521638"/>
+                  <a:pt x="995606" y="521638"/>
+                </a:cubicBezTo>
+                <a:lnTo>
+                  <a:pt x="0" y="521638"/>
+                </a:lnTo>
+                <a:close/>
+              </a:path>
+            </a:pathLst>
+          </a:custGeom>
+          <a:solidFill>
+            <a:srgbClr val="FFD767"/>
+          </a:solidFill>
+          <a:ln>
+            <a:noFill/>
+          </a:ln>
+        </p:spPr>
+        <p:style>
+          <a:lnRef idx="2">
+            <a:schemeClr val="accent4">
+              <a:shade val="15000"/>
+            </a:schemeClr>
+          </a:lnRef>
+          <a:fillRef idx="1">
+            <a:schemeClr val="accent4"/>
+          </a:fillRef>
+          <a:effectRef idx="0">
+            <a:schemeClr val="accent4"/>
+          </a:effectRef>
+          <a:fontRef idx="minor">
+            <a:schemeClr val="lt1"/>
+          </a:fontRef>
+        </p:style>
+        <p:txBody>
+          <a:bodyPr wrap="square" rtlCol="0" anchor="ctr">
+            <a:noAutofit/>
+          </a:bodyPr>
+          <a:lstStyle/>
+          <a:p>
+            <a:pPr algn="ctr"/>
+            <a:endParaRPr lang="zh-CN" altLang="en-US"/>
+          </a:p>
+        </p:txBody>
+      </p:sp>
+      <p:sp>
+        <p:nvSpPr>
+          <p:cNvPr id="136" name="文本框 135">
+            <a:extLst>
+              <a:ext uri="{FF2B5EF4-FFF2-40B4-BE49-F238E27FC236}">
+                <a16:creationId xmlns:a16="http://schemas.microsoft.com/office/drawing/2014/main" id="{C9C61996-2DFF-D23B-2CC2-A32981119470}"/>
+              </a:ext>
+            </a:extLst>
+          </p:cNvPr>
+          <p:cNvSpPr txBox="1"/>
+          <p:nvPr/>
+        </p:nvSpPr>
+        <p:spPr>
+          <a:xfrm>
+            <a:off x="666064" y="5358827"/>
+            <a:ext cx="1859903" cy="230832"/>
+          </a:xfrm>
+          <a:prstGeom prst="rect">
+            <a:avLst/>
+          </a:prstGeom>
+          <a:noFill/>
+        </p:spPr>
+        <p:txBody>
+          <a:bodyPr wrap="square" rtlCol="0">
+            <a:spAutoFit/>
+          </a:bodyPr>
+          <a:lstStyle/>
+          <a:p>
+            <a:r>
+              <a:rPr lang="en-US" altLang="zh-CN" sz="900" b="1" dirty="0">
+                <a:solidFill>
+                  <a:schemeClr val="bg1"/>
+                </a:solidFill>
+                <a:latin typeface="Comic Sans MS" panose="030F0702030302020204" pitchFamily="66" charset="0"/>
+                <a:cs typeface="Times New Roman" panose="02020603050405020304" pitchFamily="18" charset="0"/>
+              </a:rPr>
+              <a:t>Fewer attacks</a:t>
+            </a:r>
+            <a:endParaRPr lang="zh-CN" altLang="en-US" sz="900" b="1" dirty="0">
+              <a:solidFill>
+                <a:schemeClr val="bg1"/>
+              </a:solidFill>
+              <a:latin typeface="Comic Sans MS" panose="030F0702030302020204" pitchFamily="66" charset="0"/>
+              <a:cs typeface="Times New Roman" panose="02020603050405020304" pitchFamily="18" charset="0"/>
+            </a:endParaRPr>
+          </a:p>
+        </p:txBody>
+      </p:sp>
+      <p:sp>
+        <p:nvSpPr>
+          <p:cNvPr id="137" name="文本框 136">
+            <a:extLst>
+              <a:ext uri="{FF2B5EF4-FFF2-40B4-BE49-F238E27FC236}">
+                <a16:creationId xmlns:a16="http://schemas.microsoft.com/office/drawing/2014/main" id="{30E14664-0228-2F94-9C30-7E1C3C5C1E00}"/>
+              </a:ext>
+            </a:extLst>
+          </p:cNvPr>
+          <p:cNvSpPr txBox="1"/>
+          <p:nvPr/>
+        </p:nvSpPr>
+        <p:spPr>
+          <a:xfrm>
+            <a:off x="2386957" y="5358827"/>
+            <a:ext cx="920537" cy="230832"/>
+          </a:xfrm>
+          <a:prstGeom prst="rect">
+            <a:avLst/>
+          </a:prstGeom>
+          <a:noFill/>
+        </p:spPr>
+        <p:txBody>
+          <a:bodyPr wrap="square" rtlCol="0">
+            <a:spAutoFit/>
+          </a:bodyPr>
+          <a:lstStyle/>
+          <a:p>
+            <a:r>
+              <a:rPr lang="en-US" altLang="zh-CN" sz="900" b="1" i="1" dirty="0">
+                <a:solidFill>
+                  <a:schemeClr val="bg1"/>
+                </a:solidFill>
+                <a:latin typeface="Comic Sans MS" panose="030F0702030302020204" pitchFamily="66" charset="0"/>
+                <a:cs typeface="Times New Roman" panose="02020603050405020304" pitchFamily="18" charset="0"/>
+              </a:rPr>
+              <a:t>0 ~ 3,000</a:t>
+            </a:r>
+            <a:endParaRPr lang="zh-CN" altLang="en-US" sz="900" b="1" i="1" dirty="0">
+              <a:solidFill>
+                <a:schemeClr val="bg1"/>
+              </a:solidFill>
+              <a:latin typeface="Comic Sans MS" panose="030F0702030302020204" pitchFamily="66" charset="0"/>
+              <a:cs typeface="Times New Roman" panose="02020603050405020304" pitchFamily="18" charset="0"/>
+            </a:endParaRPr>
+          </a:p>
+        </p:txBody>
+      </p:sp>
+      <p:sp>
+        <p:nvSpPr>
+          <p:cNvPr id="138" name="任意多边形: 形状 137">
+            <a:extLst>
+              <a:ext uri="{FF2B5EF4-FFF2-40B4-BE49-F238E27FC236}">
+                <a16:creationId xmlns:a16="http://schemas.microsoft.com/office/drawing/2014/main" id="{761F723B-D459-8964-33C6-1ECBFF9959AC}"/>
+              </a:ext>
+            </a:extLst>
+          </p:cNvPr>
+          <p:cNvSpPr/>
+          <p:nvPr/>
+        </p:nvSpPr>
+        <p:spPr>
+          <a:xfrm>
+            <a:off x="3336964" y="5213424"/>
+            <a:ext cx="1859903" cy="521638"/>
+          </a:xfrm>
+          <a:custGeom>
+            <a:avLst/>
+            <a:gdLst>
+              <a:gd name="csX0" fmla="*/ 86941 w 1405771"/>
+              <a:gd name="csY0" fmla="*/ 0 h 521638"/>
+              <a:gd name="csX1" fmla="*/ 1405771 w 1405771"/>
+              <a:gd name="csY1" fmla="*/ 0 h 521638"/>
+              <a:gd name="csX2" fmla="*/ 1059236 w 1405771"/>
+              <a:gd name="csY2" fmla="*/ 521638 h 521638"/>
+              <a:gd name="csX3" fmla="*/ 86941 w 1405771"/>
+              <a:gd name="csY3" fmla="*/ 521638 h 521638"/>
+              <a:gd name="csX4" fmla="*/ 0 w 1405771"/>
+              <a:gd name="csY4" fmla="*/ 434697 h 521638"/>
+              <a:gd name="csX5" fmla="*/ 0 w 1405771"/>
+              <a:gd name="csY5" fmla="*/ 86941 h 521638"/>
+              <a:gd name="csX6" fmla="*/ 86941 w 1405771"/>
+              <a:gd name="csY6" fmla="*/ 0 h 521638"/>
+            </a:gdLst>
+            <a:ahLst/>
+            <a:cxnLst>
+              <a:cxn ang="0">
+                <a:pos x="csX0" y="csY0"/>
+              </a:cxn>
+              <a:cxn ang="0">
+                <a:pos x="csX1" y="csY1"/>
+              </a:cxn>
+              <a:cxn ang="0">
+                <a:pos x="csX2" y="csY2"/>
+              </a:cxn>
+              <a:cxn ang="0">
+                <a:pos x="csX3" y="csY3"/>
+              </a:cxn>
+              <a:cxn ang="0">
+                <a:pos x="csX4" y="csY4"/>
+              </a:cxn>
+              <a:cxn ang="0">
+                <a:pos x="csX5" y="csY5"/>
+              </a:cxn>
+              <a:cxn ang="0">
+                <a:pos x="csX6" y="csY6"/>
+              </a:cxn>
+            </a:cxnLst>
+            <a:rect l="l" t="t" r="r" b="b"/>
+            <a:pathLst>
+              <a:path w="1405771" h="521638">
+                <a:moveTo>
+                  <a:pt x="86941" y="0"/>
+                </a:moveTo>
+                <a:lnTo>
+                  <a:pt x="1405771" y="0"/>
+                </a:lnTo>
+                <a:lnTo>
+                  <a:pt x="1059236" y="521638"/>
+                </a:lnTo>
+                <a:lnTo>
+                  <a:pt x="86941" y="521638"/>
+                </a:lnTo>
+                <a:cubicBezTo>
+                  <a:pt x="38925" y="521638"/>
+                  <a:pt x="0" y="482713"/>
+                  <a:pt x="0" y="434697"/>
+                </a:cubicBezTo>
+                <a:lnTo>
+                  <a:pt x="0" y="86941"/>
+                </a:lnTo>
+                <a:cubicBezTo>
+                  <a:pt x="0" y="38925"/>
+                  <a:pt x="38925" y="0"/>
+                  <a:pt x="86941" y="0"/>
+                </a:cubicBezTo>
+                <a:close/>
+              </a:path>
+            </a:pathLst>
+          </a:custGeom>
+          <a:solidFill>
+            <a:srgbClr val="F9AE07"/>
+          </a:solidFill>
+          <a:ln>
+            <a:noFill/>
+          </a:ln>
+        </p:spPr>
+        <p:style>
+          <a:lnRef idx="2">
+            <a:schemeClr val="accent4">
+              <a:shade val="15000"/>
+            </a:schemeClr>
+          </a:lnRef>
+          <a:fillRef idx="1">
+            <a:schemeClr val="accent4"/>
+          </a:fillRef>
+          <a:effectRef idx="0">
+            <a:schemeClr val="accent4"/>
+          </a:effectRef>
+          <a:fontRef idx="minor">
+            <a:schemeClr val="lt1"/>
+          </a:fontRef>
+        </p:style>
+        <p:txBody>
+          <a:bodyPr wrap="square" rtlCol="0" anchor="ctr">
+            <a:noAutofit/>
+          </a:bodyPr>
+          <a:lstStyle/>
+          <a:p>
+            <a:pPr algn="ctr"/>
+            <a:endParaRPr lang="zh-CN" altLang="en-US" dirty="0"/>
+          </a:p>
+        </p:txBody>
+      </p:sp>
+      <p:sp>
+        <p:nvSpPr>
+          <p:cNvPr id="139" name="任意多边形: 形状 138">
+            <a:extLst>
+              <a:ext uri="{FF2B5EF4-FFF2-40B4-BE49-F238E27FC236}">
+                <a16:creationId xmlns:a16="http://schemas.microsoft.com/office/drawing/2014/main" id="{A6F1118C-A78A-205E-409C-DEA977039F21}"/>
+              </a:ext>
+            </a:extLst>
+          </p:cNvPr>
+          <p:cNvSpPr/>
+          <p:nvPr/>
+        </p:nvSpPr>
+        <p:spPr>
+          <a:xfrm>
+            <a:off x="4736514" y="5213424"/>
+            <a:ext cx="1082547" cy="521638"/>
+          </a:xfrm>
+          <a:custGeom>
+            <a:avLst/>
+            <a:gdLst>
+              <a:gd name="csX0" fmla="*/ 346535 w 1082547"/>
+              <a:gd name="csY0" fmla="*/ 0 h 521638"/>
+              <a:gd name="csX1" fmla="*/ 995606 w 1082547"/>
+              <a:gd name="csY1" fmla="*/ 0 h 521638"/>
+              <a:gd name="csX2" fmla="*/ 1082547 w 1082547"/>
+              <a:gd name="csY2" fmla="*/ 86941 h 521638"/>
+              <a:gd name="csX3" fmla="*/ 1082547 w 1082547"/>
+              <a:gd name="csY3" fmla="*/ 434697 h 521638"/>
+              <a:gd name="csX4" fmla="*/ 995606 w 1082547"/>
+              <a:gd name="csY4" fmla="*/ 521638 h 521638"/>
+              <a:gd name="csX5" fmla="*/ 0 w 1082547"/>
+              <a:gd name="csY5" fmla="*/ 521638 h 521638"/>
+            </a:gdLst>
+            <a:ahLst/>
+            <a:cxnLst>
+              <a:cxn ang="0">
+                <a:pos x="csX0" y="csY0"/>
+              </a:cxn>
+              <a:cxn ang="0">
+                <a:pos x="csX1" y="csY1"/>
+              </a:cxn>
+              <a:cxn ang="0">
+                <a:pos x="csX2" y="csY2"/>
+              </a:cxn>
+              <a:cxn ang="0">
+                <a:pos x="csX3" y="csY3"/>
+              </a:cxn>
+              <a:cxn ang="0">
+                <a:pos x="csX4" y="csY4"/>
+              </a:cxn>
+              <a:cxn ang="0">
+                <a:pos x="csX5" y="csY5"/>
+              </a:cxn>
+            </a:cxnLst>
+            <a:rect l="l" t="t" r="r" b="b"/>
+            <a:pathLst>
+              <a:path w="1082547" h="521638">
+                <a:moveTo>
+                  <a:pt x="346535" y="0"/>
+                </a:moveTo>
+                <a:lnTo>
+                  <a:pt x="995606" y="0"/>
+                </a:lnTo>
+                <a:cubicBezTo>
+                  <a:pt x="1043622" y="0"/>
+                  <a:pt x="1082547" y="38925"/>
+                  <a:pt x="1082547" y="86941"/>
+                </a:cubicBezTo>
+                <a:lnTo>
+                  <a:pt x="1082547" y="434697"/>
+                </a:lnTo>
+                <a:cubicBezTo>
+                  <a:pt x="1082547" y="482713"/>
+                  <a:pt x="1043622" y="521638"/>
+                  <a:pt x="995606" y="521638"/>
+                </a:cubicBezTo>
+                <a:lnTo>
+                  <a:pt x="0" y="521638"/>
+                </a:lnTo>
+                <a:close/>
+              </a:path>
+            </a:pathLst>
+          </a:custGeom>
+          <a:solidFill>
+            <a:srgbClr val="FFD767"/>
+          </a:solidFill>
+          <a:ln>
+            <a:noFill/>
+          </a:ln>
+        </p:spPr>
+        <p:style>
+          <a:lnRef idx="2">
+            <a:schemeClr val="accent4">
+              <a:shade val="15000"/>
+            </a:schemeClr>
+          </a:lnRef>
+          <a:fillRef idx="1">
+            <a:schemeClr val="accent4"/>
+          </a:fillRef>
+          <a:effectRef idx="0">
+            <a:schemeClr val="accent4"/>
+          </a:effectRef>
+          <a:fontRef idx="minor">
+            <a:schemeClr val="lt1"/>
+          </a:fontRef>
+        </p:style>
+        <p:txBody>
+          <a:bodyPr wrap="square" rtlCol="0" anchor="ctr">
+            <a:noAutofit/>
+          </a:bodyPr>
+          <a:lstStyle/>
+          <a:p>
+            <a:pPr algn="ctr"/>
+            <a:endParaRPr lang="zh-CN" altLang="en-US"/>
+          </a:p>
+        </p:txBody>
+      </p:sp>
+      <p:sp>
+        <p:nvSpPr>
+          <p:cNvPr id="140" name="文本框 139">
+            <a:extLst>
+              <a:ext uri="{FF2B5EF4-FFF2-40B4-BE49-F238E27FC236}">
+                <a16:creationId xmlns:a16="http://schemas.microsoft.com/office/drawing/2014/main" id="{85ED7DAE-1171-70B1-CAE4-C9DE2D645AAD}"/>
+              </a:ext>
+            </a:extLst>
+          </p:cNvPr>
+          <p:cNvSpPr txBox="1"/>
+          <p:nvPr/>
+        </p:nvSpPr>
+        <p:spPr>
+          <a:xfrm>
+            <a:off x="3358652" y="5358827"/>
+            <a:ext cx="1859903" cy="230832"/>
+          </a:xfrm>
+          <a:prstGeom prst="rect">
+            <a:avLst/>
+          </a:prstGeom>
+          <a:noFill/>
+        </p:spPr>
+        <p:txBody>
+          <a:bodyPr wrap="square" rtlCol="0">
+            <a:spAutoFit/>
+          </a:bodyPr>
+          <a:lstStyle/>
+          <a:p>
+            <a:r>
+              <a:rPr lang="zh-CN" altLang="en-US" sz="900" b="1" dirty="0">
+                <a:solidFill>
+                  <a:schemeClr val="bg1"/>
+                </a:solidFill>
+                <a:latin typeface="Comic Sans MS" panose="030F0702030302020204" pitchFamily="66" charset="0"/>
+                <a:cs typeface="Times New Roman" panose="02020603050405020304" pitchFamily="18" charset="0"/>
+              </a:rPr>
+              <a:t>攻击次数吧</a:t>
+            </a:r>
+          </a:p>
+        </p:txBody>
+      </p:sp>
+      <p:sp>
+        <p:nvSpPr>
+          <p:cNvPr id="141" name="文本框 140">
+            <a:extLst>
+              <a:ext uri="{FF2B5EF4-FFF2-40B4-BE49-F238E27FC236}">
+                <a16:creationId xmlns:a16="http://schemas.microsoft.com/office/drawing/2014/main" id="{8309710C-71DD-4387-BA41-4EC436A69E10}"/>
+              </a:ext>
+            </a:extLst>
+          </p:cNvPr>
+          <p:cNvSpPr txBox="1"/>
+          <p:nvPr/>
+        </p:nvSpPr>
+        <p:spPr>
+          <a:xfrm>
+            <a:off x="5079545" y="5358827"/>
+            <a:ext cx="920537" cy="230832"/>
+          </a:xfrm>
+          <a:prstGeom prst="rect">
+            <a:avLst/>
+          </a:prstGeom>
+          <a:noFill/>
+        </p:spPr>
+        <p:txBody>
+          <a:bodyPr wrap="square" rtlCol="0">
+            <a:spAutoFit/>
+          </a:bodyPr>
+          <a:lstStyle/>
+          <a:p>
+            <a:r>
+              <a:rPr lang="en-US" altLang="zh-CN" sz="900" b="1" i="1" dirty="0">
+                <a:solidFill>
+                  <a:schemeClr val="bg1"/>
+                </a:solidFill>
+                <a:latin typeface="Comic Sans MS" panose="030F0702030302020204" pitchFamily="66" charset="0"/>
+                <a:cs typeface="Times New Roman" panose="02020603050405020304" pitchFamily="18" charset="0"/>
+              </a:rPr>
+              <a:t>0 ~ 3,000</a:t>
+            </a:r>
+            <a:endParaRPr lang="zh-CN" altLang="en-US" sz="900" b="1" i="1" dirty="0">
+              <a:solidFill>
+                <a:schemeClr val="bg1"/>
+              </a:solidFill>
+              <a:latin typeface="Comic Sans MS" panose="030F0702030302020204" pitchFamily="66" charset="0"/>
+              <a:cs typeface="Times New Roman" panose="02020603050405020304" pitchFamily="18" charset="0"/>
+            </a:endParaRPr>
+          </a:p>
+        </p:txBody>
+      </p:sp>
+      <p:sp>
+        <p:nvSpPr>
+          <p:cNvPr id="142" name="任意多边形: 形状 141">
+            <a:extLst>
+              <a:ext uri="{FF2B5EF4-FFF2-40B4-BE49-F238E27FC236}">
+                <a16:creationId xmlns:a16="http://schemas.microsoft.com/office/drawing/2014/main" id="{F78BD2BE-FFEB-668C-657C-61BCB13782B5}"/>
+              </a:ext>
+            </a:extLst>
+          </p:cNvPr>
+          <p:cNvSpPr/>
+          <p:nvPr/>
+        </p:nvSpPr>
+        <p:spPr>
+          <a:xfrm>
+            <a:off x="6629053" y="3033265"/>
+            <a:ext cx="1859903" cy="521638"/>
+          </a:xfrm>
+          <a:custGeom>
+            <a:avLst/>
+            <a:gdLst>
+              <a:gd name="csX0" fmla="*/ 86941 w 1405771"/>
+              <a:gd name="csY0" fmla="*/ 0 h 521638"/>
+              <a:gd name="csX1" fmla="*/ 1405771 w 1405771"/>
+              <a:gd name="csY1" fmla="*/ 0 h 521638"/>
+              <a:gd name="csX2" fmla="*/ 1059236 w 1405771"/>
+              <a:gd name="csY2" fmla="*/ 521638 h 521638"/>
+              <a:gd name="csX3" fmla="*/ 86941 w 1405771"/>
+              <a:gd name="csY3" fmla="*/ 521638 h 521638"/>
+              <a:gd name="csX4" fmla="*/ 0 w 1405771"/>
+              <a:gd name="csY4" fmla="*/ 434697 h 521638"/>
+              <a:gd name="csX5" fmla="*/ 0 w 1405771"/>
+              <a:gd name="csY5" fmla="*/ 86941 h 521638"/>
+              <a:gd name="csX6" fmla="*/ 86941 w 1405771"/>
+              <a:gd name="csY6" fmla="*/ 0 h 521638"/>
+            </a:gdLst>
+            <a:ahLst/>
+            <a:cxnLst>
+              <a:cxn ang="0">
+                <a:pos x="csX0" y="csY0"/>
+              </a:cxn>
+              <a:cxn ang="0">
+                <a:pos x="csX1" y="csY1"/>
+              </a:cxn>
+              <a:cxn ang="0">
+                <a:pos x="csX2" y="csY2"/>
+              </a:cxn>
+              <a:cxn ang="0">
+                <a:pos x="csX3" y="csY3"/>
+              </a:cxn>
+              <a:cxn ang="0">
+                <a:pos x="csX4" y="csY4"/>
+              </a:cxn>
+              <a:cxn ang="0">
+                <a:pos x="csX5" y="csY5"/>
+              </a:cxn>
+              <a:cxn ang="0">
+                <a:pos x="csX6" y="csY6"/>
+              </a:cxn>
+            </a:cxnLst>
+            <a:rect l="l" t="t" r="r" b="b"/>
+            <a:pathLst>
+              <a:path w="1405771" h="521638">
+                <a:moveTo>
+                  <a:pt x="86941" y="0"/>
+                </a:moveTo>
+                <a:lnTo>
+                  <a:pt x="1405771" y="0"/>
+                </a:lnTo>
+                <a:lnTo>
+                  <a:pt x="1059236" y="521638"/>
+                </a:lnTo>
+                <a:lnTo>
+                  <a:pt x="86941" y="521638"/>
+                </a:lnTo>
+                <a:cubicBezTo>
+                  <a:pt x="38925" y="521638"/>
+                  <a:pt x="0" y="482713"/>
+                  <a:pt x="0" y="434697"/>
+                </a:cubicBezTo>
+                <a:lnTo>
+                  <a:pt x="0" y="86941"/>
+                </a:lnTo>
+                <a:cubicBezTo>
+                  <a:pt x="0" y="38925"/>
+                  <a:pt x="38925" y="0"/>
+                  <a:pt x="86941" y="0"/>
+                </a:cubicBezTo>
+                <a:close/>
+              </a:path>
+            </a:pathLst>
+          </a:custGeom>
+          <a:solidFill>
+            <a:srgbClr val="D92727"/>
+          </a:solidFill>
+          <a:ln>
+            <a:noFill/>
+          </a:ln>
+        </p:spPr>
+        <p:style>
+          <a:lnRef idx="2">
+            <a:schemeClr val="accent4">
+              <a:shade val="15000"/>
+            </a:schemeClr>
+          </a:lnRef>
+          <a:fillRef idx="1">
+            <a:schemeClr val="accent4"/>
+          </a:fillRef>
+          <a:effectRef idx="0">
+            <a:schemeClr val="accent4"/>
+          </a:effectRef>
+          <a:fontRef idx="minor">
+            <a:schemeClr val="lt1"/>
+          </a:fontRef>
+        </p:style>
+        <p:txBody>
+          <a:bodyPr wrap="square" rtlCol="0" anchor="ctr">
+            <a:noAutofit/>
+          </a:bodyPr>
+          <a:lstStyle/>
+          <a:p>
+            <a:pPr algn="ctr"/>
+            <a:endParaRPr lang="zh-CN" altLang="en-US" dirty="0"/>
+          </a:p>
+        </p:txBody>
+      </p:sp>
+      <p:sp>
+        <p:nvSpPr>
+          <p:cNvPr id="143" name="任意多边形: 形状 142">
+            <a:extLst>
+              <a:ext uri="{FF2B5EF4-FFF2-40B4-BE49-F238E27FC236}">
+                <a16:creationId xmlns:a16="http://schemas.microsoft.com/office/drawing/2014/main" id="{143C00E6-007D-02AA-A437-7F8F1234B4AB}"/>
+              </a:ext>
+            </a:extLst>
+          </p:cNvPr>
+          <p:cNvSpPr/>
+          <p:nvPr/>
+        </p:nvSpPr>
+        <p:spPr>
+          <a:xfrm>
+            <a:off x="8024370" y="3031949"/>
+            <a:ext cx="1082547" cy="521638"/>
+          </a:xfrm>
+          <a:custGeom>
+            <a:avLst/>
+            <a:gdLst>
+              <a:gd name="csX0" fmla="*/ 346535 w 1082547"/>
+              <a:gd name="csY0" fmla="*/ 0 h 521638"/>
+              <a:gd name="csX1" fmla="*/ 995606 w 1082547"/>
+              <a:gd name="csY1" fmla="*/ 0 h 521638"/>
+              <a:gd name="csX2" fmla="*/ 1082547 w 1082547"/>
+              <a:gd name="csY2" fmla="*/ 86941 h 521638"/>
+              <a:gd name="csX3" fmla="*/ 1082547 w 1082547"/>
+              <a:gd name="csY3" fmla="*/ 434697 h 521638"/>
+              <a:gd name="csX4" fmla="*/ 995606 w 1082547"/>
+              <a:gd name="csY4" fmla="*/ 521638 h 521638"/>
+              <a:gd name="csX5" fmla="*/ 0 w 1082547"/>
+              <a:gd name="csY5" fmla="*/ 521638 h 521638"/>
+            </a:gdLst>
+            <a:ahLst/>
+            <a:cxnLst>
+              <a:cxn ang="0">
+                <a:pos x="csX0" y="csY0"/>
+              </a:cxn>
+              <a:cxn ang="0">
+                <a:pos x="csX1" y="csY1"/>
+              </a:cxn>
+              <a:cxn ang="0">
+                <a:pos x="csX2" y="csY2"/>
+              </a:cxn>
+              <a:cxn ang="0">
+                <a:pos x="csX3" y="csY3"/>
+              </a:cxn>
+              <a:cxn ang="0">
+                <a:pos x="csX4" y="csY4"/>
+              </a:cxn>
+              <a:cxn ang="0">
+                <a:pos x="csX5" y="csY5"/>
+              </a:cxn>
+            </a:cxnLst>
+            <a:rect l="l" t="t" r="r" b="b"/>
+            <a:pathLst>
+              <a:path w="1082547" h="521638">
+                <a:moveTo>
+                  <a:pt x="346535" y="0"/>
+                </a:moveTo>
+                <a:lnTo>
+                  <a:pt x="995606" y="0"/>
+                </a:lnTo>
+                <a:cubicBezTo>
+                  <a:pt x="1043622" y="0"/>
+                  <a:pt x="1082547" y="38925"/>
+                  <a:pt x="1082547" y="86941"/>
+                </a:cubicBezTo>
+                <a:lnTo>
+                  <a:pt x="1082547" y="434697"/>
+                </a:lnTo>
+                <a:cubicBezTo>
+                  <a:pt x="1082547" y="482713"/>
+                  <a:pt x="1043622" y="521638"/>
+                  <a:pt x="995606" y="521638"/>
+                </a:cubicBezTo>
+                <a:lnTo>
+                  <a:pt x="0" y="521638"/>
+                </a:lnTo>
+                <a:close/>
+              </a:path>
+            </a:pathLst>
+          </a:custGeom>
+          <a:solidFill>
+            <a:srgbClr val="FD9A69"/>
+          </a:solidFill>
+          <a:ln>
+            <a:noFill/>
+          </a:ln>
+        </p:spPr>
+        <p:style>
+          <a:lnRef idx="2">
+            <a:schemeClr val="accent4">
+              <a:shade val="15000"/>
+            </a:schemeClr>
+          </a:lnRef>
+          <a:fillRef idx="1">
+            <a:schemeClr val="accent4"/>
+          </a:fillRef>
+          <a:effectRef idx="0">
+            <a:schemeClr val="accent4"/>
+          </a:effectRef>
+          <a:fontRef idx="minor">
+            <a:schemeClr val="lt1"/>
+          </a:fontRef>
+        </p:style>
+        <p:txBody>
+          <a:bodyPr wrap="square" rtlCol="0" anchor="ctr">
+            <a:noAutofit/>
+          </a:bodyPr>
+          <a:lstStyle/>
+          <a:p>
+            <a:pPr algn="ctr"/>
+            <a:endParaRPr lang="zh-CN" altLang="en-US"/>
+          </a:p>
+        </p:txBody>
+      </p:sp>
+      <p:sp>
+        <p:nvSpPr>
+          <p:cNvPr id="144" name="文本框 143">
+            <a:extLst>
+              <a:ext uri="{FF2B5EF4-FFF2-40B4-BE49-F238E27FC236}">
+                <a16:creationId xmlns:a16="http://schemas.microsoft.com/office/drawing/2014/main" id="{C6A0E483-CF45-734B-334A-932CB4F983AB}"/>
+              </a:ext>
+            </a:extLst>
+          </p:cNvPr>
+          <p:cNvSpPr txBox="1"/>
+          <p:nvPr/>
+        </p:nvSpPr>
+        <p:spPr>
+          <a:xfrm>
+            <a:off x="6650741" y="3108102"/>
+            <a:ext cx="1386328" cy="369332"/>
+          </a:xfrm>
+          <a:prstGeom prst="rect">
+            <a:avLst/>
+          </a:prstGeom>
+          <a:noFill/>
+        </p:spPr>
+        <p:txBody>
+          <a:bodyPr wrap="square" rtlCol="0">
+            <a:spAutoFit/>
+          </a:bodyPr>
+          <a:lstStyle/>
+          <a:p>
+            <a:r>
+              <a:rPr lang="en-US" altLang="zh-CN" sz="900" b="1" dirty="0">
+                <a:solidFill>
+                  <a:schemeClr val="bg1"/>
+                </a:solidFill>
+                <a:latin typeface="Comic Sans MS" panose="030F0702030302020204" pitchFamily="66" charset="0"/>
+                <a:cs typeface="Times New Roman" panose="02020603050405020304" pitchFamily="18" charset="0"/>
+              </a:rPr>
+              <a:t>Rival or </a:t>
+            </a:r>
+          </a:p>
+          <a:p>
+            <a:r>
+              <a:rPr lang="en-US" altLang="zh-CN" sz="900" b="1">
+                <a:solidFill>
+                  <a:schemeClr val="bg1"/>
+                </a:solidFill>
+                <a:latin typeface="Comic Sans MS" panose="030F0702030302020204" pitchFamily="66" charset="0"/>
+                <a:cs typeface="Times New Roman" panose="02020603050405020304" pitchFamily="18" charset="0"/>
+              </a:rPr>
+              <a:t>Seasonal Outfit</a:t>
+            </a:r>
+            <a:endParaRPr lang="zh-CN" altLang="en-US" sz="900" b="1" dirty="0">
+              <a:solidFill>
+                <a:schemeClr val="bg1"/>
+              </a:solidFill>
+              <a:latin typeface="Comic Sans MS" panose="030F0702030302020204" pitchFamily="66" charset="0"/>
+              <a:cs typeface="Times New Roman" panose="02020603050405020304" pitchFamily="18" charset="0"/>
+            </a:endParaRPr>
+          </a:p>
+        </p:txBody>
+      </p:sp>
+      <p:sp>
+        <p:nvSpPr>
+          <p:cNvPr id="145" name="文本框 144">
+            <a:extLst>
+              <a:ext uri="{FF2B5EF4-FFF2-40B4-BE49-F238E27FC236}">
+                <a16:creationId xmlns:a16="http://schemas.microsoft.com/office/drawing/2014/main" id="{B04C1EC0-ED4C-E56C-BF1A-DCCB662445E4}"/>
+              </a:ext>
+            </a:extLst>
+          </p:cNvPr>
+          <p:cNvSpPr txBox="1"/>
+          <p:nvPr/>
+        </p:nvSpPr>
+        <p:spPr>
+          <a:xfrm>
+            <a:off x="8334812" y="3177352"/>
+            <a:ext cx="920537" cy="230832"/>
+          </a:xfrm>
+          <a:prstGeom prst="rect">
+            <a:avLst/>
+          </a:prstGeom>
+          <a:noFill/>
+        </p:spPr>
+        <p:txBody>
+          <a:bodyPr wrap="square" rtlCol="0">
+            <a:spAutoFit/>
+          </a:bodyPr>
+          <a:lstStyle/>
+          <a:p>
+            <a:r>
+              <a:rPr lang="en-US" altLang="zh-CN" sz="900" b="1" i="1" dirty="0">
+                <a:solidFill>
+                  <a:schemeClr val="bg1"/>
+                </a:solidFill>
+                <a:latin typeface="Comic Sans MS" panose="030F0702030302020204" pitchFamily="66" charset="0"/>
+                <a:cs typeface="Times New Roman" panose="02020603050405020304" pitchFamily="18" charset="0"/>
+              </a:rPr>
+              <a:t>0 or 1,000</a:t>
+            </a:r>
+            <a:endParaRPr lang="zh-CN" altLang="en-US" sz="900" b="1" i="1" dirty="0">
+              <a:solidFill>
+                <a:schemeClr val="bg1"/>
+              </a:solidFill>
+              <a:latin typeface="Comic Sans MS" panose="030F0702030302020204" pitchFamily="66" charset="0"/>
+              <a:cs typeface="Times New Roman" panose="02020603050405020304" pitchFamily="18" charset="0"/>
+            </a:endParaRPr>
+          </a:p>
+        </p:txBody>
+      </p:sp>
+      <p:sp>
+        <p:nvSpPr>
+          <p:cNvPr id="146" name="任意多边形: 形状 145">
+            <a:extLst>
+              <a:ext uri="{FF2B5EF4-FFF2-40B4-BE49-F238E27FC236}">
+                <a16:creationId xmlns:a16="http://schemas.microsoft.com/office/drawing/2014/main" id="{1E796F5A-06E3-4A22-1B9E-D70296B0D822}"/>
+              </a:ext>
+            </a:extLst>
+          </p:cNvPr>
+          <p:cNvSpPr/>
+          <p:nvPr/>
+        </p:nvSpPr>
+        <p:spPr>
+          <a:xfrm>
+            <a:off x="6629053" y="3621521"/>
+            <a:ext cx="1859903" cy="521638"/>
+          </a:xfrm>
+          <a:custGeom>
+            <a:avLst/>
+            <a:gdLst>
+              <a:gd name="csX0" fmla="*/ 86941 w 1405771"/>
+              <a:gd name="csY0" fmla="*/ 0 h 521638"/>
+              <a:gd name="csX1" fmla="*/ 1405771 w 1405771"/>
+              <a:gd name="csY1" fmla="*/ 0 h 521638"/>
+              <a:gd name="csX2" fmla="*/ 1059236 w 1405771"/>
+              <a:gd name="csY2" fmla="*/ 521638 h 521638"/>
+              <a:gd name="csX3" fmla="*/ 86941 w 1405771"/>
+              <a:gd name="csY3" fmla="*/ 521638 h 521638"/>
+              <a:gd name="csX4" fmla="*/ 0 w 1405771"/>
+              <a:gd name="csY4" fmla="*/ 434697 h 521638"/>
+              <a:gd name="csX5" fmla="*/ 0 w 1405771"/>
+              <a:gd name="csY5" fmla="*/ 86941 h 521638"/>
+              <a:gd name="csX6" fmla="*/ 86941 w 1405771"/>
+              <a:gd name="csY6" fmla="*/ 0 h 521638"/>
+            </a:gdLst>
+            <a:ahLst/>
+            <a:cxnLst>
+              <a:cxn ang="0">
+                <a:pos x="csX0" y="csY0"/>
+              </a:cxn>
+              <a:cxn ang="0">
+                <a:pos x="csX1" y="csY1"/>
+              </a:cxn>
+              <a:cxn ang="0">
+                <a:pos x="csX2" y="csY2"/>
+              </a:cxn>
+              <a:cxn ang="0">
+                <a:pos x="csX3" y="csY3"/>
+              </a:cxn>
+              <a:cxn ang="0">
+                <a:pos x="csX4" y="csY4"/>
+              </a:cxn>
+              <a:cxn ang="0">
+                <a:pos x="csX5" y="csY5"/>
+              </a:cxn>
+              <a:cxn ang="0">
+                <a:pos x="csX6" y="csY6"/>
+              </a:cxn>
+            </a:cxnLst>
+            <a:rect l="l" t="t" r="r" b="b"/>
+            <a:pathLst>
+              <a:path w="1405771" h="521638">
+                <a:moveTo>
+                  <a:pt x="86941" y="0"/>
+                </a:moveTo>
+                <a:lnTo>
+                  <a:pt x="1405771" y="0"/>
+                </a:lnTo>
+                <a:lnTo>
+                  <a:pt x="1059236" y="521638"/>
+                </a:lnTo>
+                <a:lnTo>
+                  <a:pt x="86941" y="521638"/>
+                </a:lnTo>
+                <a:cubicBezTo>
+                  <a:pt x="38925" y="521638"/>
+                  <a:pt x="0" y="482713"/>
+                  <a:pt x="0" y="434697"/>
+                </a:cubicBezTo>
+                <a:lnTo>
+                  <a:pt x="0" y="86941"/>
+                </a:lnTo>
+                <a:cubicBezTo>
+                  <a:pt x="0" y="38925"/>
+                  <a:pt x="38925" y="0"/>
+                  <a:pt x="86941" y="0"/>
+                </a:cubicBezTo>
+                <a:close/>
+              </a:path>
+            </a:pathLst>
+          </a:custGeom>
+          <a:solidFill>
+            <a:srgbClr val="D92727"/>
+          </a:solidFill>
+          <a:ln>
+            <a:noFill/>
+          </a:ln>
+        </p:spPr>
+        <p:style>
+          <a:lnRef idx="2">
+            <a:schemeClr val="accent4">
+              <a:shade val="15000"/>
+            </a:schemeClr>
+          </a:lnRef>
+          <a:fillRef idx="1">
+            <a:schemeClr val="accent4"/>
+          </a:fillRef>
+          <a:effectRef idx="0">
+            <a:schemeClr val="accent4"/>
+          </a:effectRef>
+          <a:fontRef idx="minor">
+            <a:schemeClr val="lt1"/>
+          </a:fontRef>
+        </p:style>
+        <p:txBody>
+          <a:bodyPr wrap="square" rtlCol="0" anchor="ctr">
+            <a:noAutofit/>
+          </a:bodyPr>
+          <a:lstStyle/>
+          <a:p>
+            <a:pPr algn="ctr"/>
+            <a:endParaRPr lang="zh-CN" altLang="en-US" dirty="0"/>
+          </a:p>
+        </p:txBody>
+      </p:sp>
+      <p:sp>
+        <p:nvSpPr>
+          <p:cNvPr id="147" name="任意多边形: 形状 146">
+            <a:extLst>
+              <a:ext uri="{FF2B5EF4-FFF2-40B4-BE49-F238E27FC236}">
+                <a16:creationId xmlns:a16="http://schemas.microsoft.com/office/drawing/2014/main" id="{F7BA6637-3F2C-CE62-A2CA-14149BB3F119}"/>
+              </a:ext>
+            </a:extLst>
+          </p:cNvPr>
+          <p:cNvSpPr/>
+          <p:nvPr/>
+        </p:nvSpPr>
+        <p:spPr>
+          <a:xfrm>
+            <a:off x="8024370" y="3621521"/>
+            <a:ext cx="1082547" cy="521638"/>
+          </a:xfrm>
+          <a:custGeom>
+            <a:avLst/>
+            <a:gdLst>
+              <a:gd name="csX0" fmla="*/ 346535 w 1082547"/>
+              <a:gd name="csY0" fmla="*/ 0 h 521638"/>
+              <a:gd name="csX1" fmla="*/ 995606 w 1082547"/>
+              <a:gd name="csY1" fmla="*/ 0 h 521638"/>
+              <a:gd name="csX2" fmla="*/ 1082547 w 1082547"/>
+              <a:gd name="csY2" fmla="*/ 86941 h 521638"/>
+              <a:gd name="csX3" fmla="*/ 1082547 w 1082547"/>
+              <a:gd name="csY3" fmla="*/ 434697 h 521638"/>
+              <a:gd name="csX4" fmla="*/ 995606 w 1082547"/>
+              <a:gd name="csY4" fmla="*/ 521638 h 521638"/>
+              <a:gd name="csX5" fmla="*/ 0 w 1082547"/>
+              <a:gd name="csY5" fmla="*/ 521638 h 521638"/>
+            </a:gdLst>
+            <a:ahLst/>
+            <a:cxnLst>
+              <a:cxn ang="0">
+                <a:pos x="csX0" y="csY0"/>
+              </a:cxn>
+              <a:cxn ang="0">
+                <a:pos x="csX1" y="csY1"/>
+              </a:cxn>
+              <a:cxn ang="0">
+                <a:pos x="csX2" y="csY2"/>
+              </a:cxn>
+              <a:cxn ang="0">
+                <a:pos x="csX3" y="csY3"/>
+              </a:cxn>
+              <a:cxn ang="0">
+                <a:pos x="csX4" y="csY4"/>
+              </a:cxn>
+              <a:cxn ang="0">
+                <a:pos x="csX5" y="csY5"/>
+              </a:cxn>
+            </a:cxnLst>
+            <a:rect l="l" t="t" r="r" b="b"/>
+            <a:pathLst>
+              <a:path w="1082547" h="521638">
+                <a:moveTo>
+                  <a:pt x="346535" y="0"/>
+                </a:moveTo>
+                <a:lnTo>
+                  <a:pt x="995606" y="0"/>
+                </a:lnTo>
+                <a:cubicBezTo>
+                  <a:pt x="1043622" y="0"/>
+                  <a:pt x="1082547" y="38925"/>
+                  <a:pt x="1082547" y="86941"/>
+                </a:cubicBezTo>
+                <a:lnTo>
+                  <a:pt x="1082547" y="434697"/>
+                </a:lnTo>
+                <a:cubicBezTo>
+                  <a:pt x="1082547" y="482713"/>
+                  <a:pt x="1043622" y="521638"/>
+                  <a:pt x="995606" y="521638"/>
+                </a:cubicBezTo>
+                <a:lnTo>
+                  <a:pt x="0" y="521638"/>
+                </a:lnTo>
+                <a:close/>
+              </a:path>
+            </a:pathLst>
+          </a:custGeom>
+          <a:solidFill>
+            <a:srgbClr val="FD9A69"/>
+          </a:solidFill>
+          <a:ln>
+            <a:noFill/>
+          </a:ln>
+        </p:spPr>
+        <p:style>
+          <a:lnRef idx="2">
+            <a:schemeClr val="accent4">
+              <a:shade val="15000"/>
+            </a:schemeClr>
+          </a:lnRef>
+          <a:fillRef idx="1">
+            <a:schemeClr val="accent4"/>
+          </a:fillRef>
+          <a:effectRef idx="0">
+            <a:schemeClr val="accent4"/>
+          </a:effectRef>
+          <a:fontRef idx="minor">
+            <a:schemeClr val="lt1"/>
+          </a:fontRef>
+        </p:style>
+        <p:txBody>
+          <a:bodyPr wrap="square" rtlCol="0" anchor="ctr">
+            <a:noAutofit/>
+          </a:bodyPr>
+          <a:lstStyle/>
+          <a:p>
+            <a:pPr algn="ctr"/>
+            <a:endParaRPr lang="zh-CN" altLang="en-US"/>
+          </a:p>
+        </p:txBody>
+      </p:sp>
+      <p:sp>
+        <p:nvSpPr>
+          <p:cNvPr id="148" name="文本框 147">
+            <a:extLst>
+              <a:ext uri="{FF2B5EF4-FFF2-40B4-BE49-F238E27FC236}">
+                <a16:creationId xmlns:a16="http://schemas.microsoft.com/office/drawing/2014/main" id="{D0C53D5F-0071-E23E-C504-29435382012C}"/>
+              </a:ext>
+            </a:extLst>
+          </p:cNvPr>
+          <p:cNvSpPr txBox="1"/>
+          <p:nvPr/>
+        </p:nvSpPr>
+        <p:spPr>
+          <a:xfrm>
+            <a:off x="6650741" y="3745013"/>
+            <a:ext cx="1386328" cy="230832"/>
+          </a:xfrm>
+          <a:prstGeom prst="rect">
+            <a:avLst/>
+          </a:prstGeom>
+          <a:noFill/>
+        </p:spPr>
+        <p:txBody>
+          <a:bodyPr wrap="square" rtlCol="0">
+            <a:spAutoFit/>
+          </a:bodyPr>
+          <a:lstStyle/>
+          <a:p>
+            <a:r>
+              <a:rPr lang="en-US" altLang="zh-CN" sz="900" b="1" dirty="0">
+                <a:solidFill>
+                  <a:schemeClr val="bg1"/>
+                </a:solidFill>
+                <a:latin typeface="Comic Sans MS" panose="030F0702030302020204" pitchFamily="66" charset="0"/>
+                <a:cs typeface="Times New Roman" panose="02020603050405020304" pitchFamily="18" charset="0"/>
+              </a:rPr>
+              <a:t>Sprint</a:t>
+            </a:r>
+            <a:endParaRPr lang="zh-CN" altLang="en-US" sz="900" b="1" dirty="0">
+              <a:solidFill>
+                <a:schemeClr val="bg1"/>
+              </a:solidFill>
+              <a:latin typeface="Comic Sans MS" panose="030F0702030302020204" pitchFamily="66" charset="0"/>
+              <a:cs typeface="Times New Roman" panose="02020603050405020304" pitchFamily="18" charset="0"/>
+            </a:endParaRPr>
+          </a:p>
+        </p:txBody>
+      </p:sp>
+      <p:sp>
+        <p:nvSpPr>
+          <p:cNvPr id="149" name="文本框 148">
+            <a:extLst>
+              <a:ext uri="{FF2B5EF4-FFF2-40B4-BE49-F238E27FC236}">
+                <a16:creationId xmlns:a16="http://schemas.microsoft.com/office/drawing/2014/main" id="{F196D257-301A-9F60-78A5-C331CF1DD1AC}"/>
+              </a:ext>
+            </a:extLst>
+          </p:cNvPr>
+          <p:cNvSpPr txBox="1"/>
+          <p:nvPr/>
+        </p:nvSpPr>
+        <p:spPr>
+          <a:xfrm>
+            <a:off x="8334812" y="3766924"/>
+            <a:ext cx="920537" cy="230832"/>
+          </a:xfrm>
+          <a:prstGeom prst="rect">
+            <a:avLst/>
+          </a:prstGeom>
+          <a:noFill/>
+        </p:spPr>
+        <p:txBody>
+          <a:bodyPr wrap="square" rtlCol="0">
+            <a:spAutoFit/>
+          </a:bodyPr>
+          <a:lstStyle/>
+          <a:p>
+            <a:r>
+              <a:rPr lang="en-US" altLang="zh-CN" sz="900" b="1" i="1" dirty="0">
+                <a:solidFill>
+                  <a:schemeClr val="bg1"/>
+                </a:solidFill>
+                <a:latin typeface="Comic Sans MS" panose="030F0702030302020204" pitchFamily="66" charset="0"/>
+                <a:cs typeface="Times New Roman" panose="02020603050405020304" pitchFamily="18" charset="0"/>
+              </a:rPr>
+              <a:t>0 or 1,000</a:t>
+            </a:r>
+            <a:endParaRPr lang="zh-CN" altLang="en-US" sz="900" b="1" i="1" dirty="0">
+              <a:solidFill>
+                <a:schemeClr val="bg1"/>
+              </a:solidFill>
+              <a:latin typeface="Comic Sans MS" panose="030F0702030302020204" pitchFamily="66" charset="0"/>
+              <a:cs typeface="Times New Roman" panose="02020603050405020304" pitchFamily="18" charset="0"/>
+            </a:endParaRPr>
+          </a:p>
+        </p:txBody>
+      </p:sp>
+      <p:sp>
+        <p:nvSpPr>
+          <p:cNvPr id="150" name="任意多边形: 形状 149">
+            <a:extLst>
+              <a:ext uri="{FF2B5EF4-FFF2-40B4-BE49-F238E27FC236}">
+                <a16:creationId xmlns:a16="http://schemas.microsoft.com/office/drawing/2014/main" id="{7D37EB98-E0EE-4002-6FBE-9E368C8C2C52}"/>
+              </a:ext>
+            </a:extLst>
+          </p:cNvPr>
+          <p:cNvSpPr/>
+          <p:nvPr/>
+        </p:nvSpPr>
+        <p:spPr>
+          <a:xfrm>
+            <a:off x="6620706" y="4334362"/>
+            <a:ext cx="1859903" cy="521638"/>
+          </a:xfrm>
+          <a:custGeom>
+            <a:avLst/>
+            <a:gdLst>
+              <a:gd name="csX0" fmla="*/ 86941 w 1405771"/>
+              <a:gd name="csY0" fmla="*/ 0 h 521638"/>
+              <a:gd name="csX1" fmla="*/ 1405771 w 1405771"/>
+              <a:gd name="csY1" fmla="*/ 0 h 521638"/>
+              <a:gd name="csX2" fmla="*/ 1059236 w 1405771"/>
+              <a:gd name="csY2" fmla="*/ 521638 h 521638"/>
+              <a:gd name="csX3" fmla="*/ 86941 w 1405771"/>
+              <a:gd name="csY3" fmla="*/ 521638 h 521638"/>
+              <a:gd name="csX4" fmla="*/ 0 w 1405771"/>
+              <a:gd name="csY4" fmla="*/ 434697 h 521638"/>
+              <a:gd name="csX5" fmla="*/ 0 w 1405771"/>
+              <a:gd name="csY5" fmla="*/ 86941 h 521638"/>
+              <a:gd name="csX6" fmla="*/ 86941 w 1405771"/>
+              <a:gd name="csY6" fmla="*/ 0 h 521638"/>
+            </a:gdLst>
+            <a:ahLst/>
+            <a:cxnLst>
+              <a:cxn ang="0">
+                <a:pos x="csX0" y="csY0"/>
+              </a:cxn>
+              <a:cxn ang="0">
+                <a:pos x="csX1" y="csY1"/>
+              </a:cxn>
+              <a:cxn ang="0">
+                <a:pos x="csX2" y="csY2"/>
+              </a:cxn>
+              <a:cxn ang="0">
+                <a:pos x="csX3" y="csY3"/>
+              </a:cxn>
+              <a:cxn ang="0">
+                <a:pos x="csX4" y="csY4"/>
+              </a:cxn>
+              <a:cxn ang="0">
+                <a:pos x="csX5" y="csY5"/>
+              </a:cxn>
+              <a:cxn ang="0">
+                <a:pos x="csX6" y="csY6"/>
+              </a:cxn>
+            </a:cxnLst>
+            <a:rect l="l" t="t" r="r" b="b"/>
+            <a:pathLst>
+              <a:path w="1405771" h="521638">
+                <a:moveTo>
+                  <a:pt x="86941" y="0"/>
+                </a:moveTo>
+                <a:lnTo>
+                  <a:pt x="1405771" y="0"/>
+                </a:lnTo>
+                <a:lnTo>
+                  <a:pt x="1059236" y="521638"/>
+                </a:lnTo>
+                <a:lnTo>
+                  <a:pt x="86941" y="521638"/>
+                </a:lnTo>
+                <a:cubicBezTo>
+                  <a:pt x="38925" y="521638"/>
+                  <a:pt x="0" y="482713"/>
+                  <a:pt x="0" y="434697"/>
+                </a:cubicBezTo>
+                <a:lnTo>
+                  <a:pt x="0" y="86941"/>
+                </a:lnTo>
+                <a:cubicBezTo>
+                  <a:pt x="0" y="38925"/>
+                  <a:pt x="38925" y="0"/>
+                  <a:pt x="86941" y="0"/>
+                </a:cubicBezTo>
+                <a:close/>
+              </a:path>
+            </a:pathLst>
+          </a:custGeom>
+          <a:solidFill>
+            <a:srgbClr val="D92727"/>
+          </a:solidFill>
+          <a:ln>
+            <a:noFill/>
+          </a:ln>
+        </p:spPr>
+        <p:style>
+          <a:lnRef idx="2">
+            <a:schemeClr val="accent4">
+              <a:shade val="15000"/>
+            </a:schemeClr>
+          </a:lnRef>
+          <a:fillRef idx="1">
+            <a:schemeClr val="accent4"/>
+          </a:fillRef>
+          <a:effectRef idx="0">
+            <a:schemeClr val="accent4"/>
+          </a:effectRef>
+          <a:fontRef idx="minor">
+            <a:schemeClr val="lt1"/>
+          </a:fontRef>
+        </p:style>
+        <p:txBody>
+          <a:bodyPr wrap="square" rtlCol="0" anchor="ctr">
+            <a:noAutofit/>
+          </a:bodyPr>
+          <a:lstStyle/>
+          <a:p>
+            <a:pPr algn="ctr"/>
+            <a:endParaRPr lang="zh-CN" altLang="en-US" dirty="0"/>
+          </a:p>
+        </p:txBody>
+      </p:sp>
+      <p:sp>
+        <p:nvSpPr>
+          <p:cNvPr id="151" name="任意多边形: 形状 150">
+            <a:extLst>
+              <a:ext uri="{FF2B5EF4-FFF2-40B4-BE49-F238E27FC236}">
+                <a16:creationId xmlns:a16="http://schemas.microsoft.com/office/drawing/2014/main" id="{0A6E9C8F-478C-D8A5-0C0B-552D308B7455}"/>
+              </a:ext>
+            </a:extLst>
+          </p:cNvPr>
+          <p:cNvSpPr/>
+          <p:nvPr/>
+        </p:nvSpPr>
+        <p:spPr>
+          <a:xfrm>
+            <a:off x="8016023" y="4333046"/>
+            <a:ext cx="1082547" cy="521638"/>
+          </a:xfrm>
+          <a:custGeom>
+            <a:avLst/>
+            <a:gdLst>
+              <a:gd name="csX0" fmla="*/ 346535 w 1082547"/>
+              <a:gd name="csY0" fmla="*/ 0 h 521638"/>
+              <a:gd name="csX1" fmla="*/ 995606 w 1082547"/>
+              <a:gd name="csY1" fmla="*/ 0 h 521638"/>
+              <a:gd name="csX2" fmla="*/ 1082547 w 1082547"/>
+              <a:gd name="csY2" fmla="*/ 86941 h 521638"/>
+              <a:gd name="csX3" fmla="*/ 1082547 w 1082547"/>
+              <a:gd name="csY3" fmla="*/ 434697 h 521638"/>
+              <a:gd name="csX4" fmla="*/ 995606 w 1082547"/>
+              <a:gd name="csY4" fmla="*/ 521638 h 521638"/>
+              <a:gd name="csX5" fmla="*/ 0 w 1082547"/>
+              <a:gd name="csY5" fmla="*/ 521638 h 521638"/>
+            </a:gdLst>
+            <a:ahLst/>
+            <a:cxnLst>
+              <a:cxn ang="0">
+                <a:pos x="csX0" y="csY0"/>
+              </a:cxn>
+              <a:cxn ang="0">
+                <a:pos x="csX1" y="csY1"/>
+              </a:cxn>
+              <a:cxn ang="0">
+                <a:pos x="csX2" y="csY2"/>
+              </a:cxn>
+              <a:cxn ang="0">
+                <a:pos x="csX3" y="csY3"/>
+              </a:cxn>
+              <a:cxn ang="0">
+                <a:pos x="csX4" y="csY4"/>
+              </a:cxn>
+              <a:cxn ang="0">
+                <a:pos x="csX5" y="csY5"/>
+              </a:cxn>
+            </a:cxnLst>
+            <a:rect l="l" t="t" r="r" b="b"/>
+            <a:pathLst>
+              <a:path w="1082547" h="521638">
+                <a:moveTo>
+                  <a:pt x="346535" y="0"/>
+                </a:moveTo>
+                <a:lnTo>
+                  <a:pt x="995606" y="0"/>
+                </a:lnTo>
+                <a:cubicBezTo>
+                  <a:pt x="1043622" y="0"/>
+                  <a:pt x="1082547" y="38925"/>
+                  <a:pt x="1082547" y="86941"/>
+                </a:cubicBezTo>
+                <a:lnTo>
+                  <a:pt x="1082547" y="434697"/>
+                </a:lnTo>
+                <a:cubicBezTo>
+                  <a:pt x="1082547" y="482713"/>
+                  <a:pt x="1043622" y="521638"/>
+                  <a:pt x="995606" y="521638"/>
+                </a:cubicBezTo>
+                <a:lnTo>
+                  <a:pt x="0" y="521638"/>
+                </a:lnTo>
+                <a:close/>
+              </a:path>
+            </a:pathLst>
+          </a:custGeom>
+          <a:solidFill>
+            <a:srgbClr val="FD9A69"/>
+          </a:solidFill>
+          <a:ln>
+            <a:noFill/>
+          </a:ln>
+        </p:spPr>
+        <p:style>
+          <a:lnRef idx="2">
+            <a:schemeClr val="accent4">
+              <a:shade val="15000"/>
+            </a:schemeClr>
+          </a:lnRef>
+          <a:fillRef idx="1">
+            <a:schemeClr val="accent4"/>
+          </a:fillRef>
+          <a:effectRef idx="0">
+            <a:schemeClr val="accent4"/>
+          </a:effectRef>
+          <a:fontRef idx="minor">
+            <a:schemeClr val="lt1"/>
+          </a:fontRef>
+        </p:style>
+        <p:txBody>
+          <a:bodyPr wrap="square" rtlCol="0" anchor="ctr">
+            <a:noAutofit/>
+          </a:bodyPr>
+          <a:lstStyle/>
+          <a:p>
+            <a:pPr algn="ctr"/>
+            <a:endParaRPr lang="zh-CN" altLang="en-US"/>
+          </a:p>
+        </p:txBody>
+      </p:sp>
+      <p:sp>
+        <p:nvSpPr>
+          <p:cNvPr id="152" name="文本框 151">
+            <a:extLst>
+              <a:ext uri="{FF2B5EF4-FFF2-40B4-BE49-F238E27FC236}">
+                <a16:creationId xmlns:a16="http://schemas.microsoft.com/office/drawing/2014/main" id="{3DE52702-10A8-2BBB-B398-A9186618A550}"/>
+              </a:ext>
+            </a:extLst>
+          </p:cNvPr>
+          <p:cNvSpPr txBox="1"/>
+          <p:nvPr/>
+        </p:nvSpPr>
+        <p:spPr>
+          <a:xfrm>
+            <a:off x="6642394" y="4409199"/>
+            <a:ext cx="1386328" cy="369332"/>
+          </a:xfrm>
+          <a:prstGeom prst="rect">
+            <a:avLst/>
+          </a:prstGeom>
+          <a:noFill/>
+        </p:spPr>
+        <p:txBody>
+          <a:bodyPr wrap="square" rtlCol="0">
+            <a:spAutoFit/>
+          </a:bodyPr>
+          <a:lstStyle/>
+          <a:p>
+            <a:r>
+              <a:rPr lang="zh-CN" altLang="en-US" sz="900" b="1" dirty="0">
+                <a:solidFill>
+                  <a:schemeClr val="bg1"/>
+                </a:solidFill>
+                <a:latin typeface="Comic Sans MS" panose="030F0702030302020204" pitchFamily="66" charset="0"/>
+                <a:cs typeface="Times New Roman" panose="02020603050405020304" pitchFamily="18" charset="0"/>
+              </a:rPr>
+              <a:t>劲敌或</a:t>
+            </a:r>
+            <a:endParaRPr lang="en-US" altLang="zh-CN" sz="900" b="1" dirty="0">
+              <a:solidFill>
+                <a:schemeClr val="bg1"/>
+              </a:solidFill>
+              <a:latin typeface="Comic Sans MS" panose="030F0702030302020204" pitchFamily="66" charset="0"/>
+              <a:cs typeface="Times New Roman" panose="02020603050405020304" pitchFamily="18" charset="0"/>
+            </a:endParaRPr>
+          </a:p>
+          <a:p>
+            <a:r>
+              <a:rPr lang="zh-CN" altLang="en-US" sz="900" b="1" dirty="0">
+                <a:solidFill>
+                  <a:schemeClr val="bg1"/>
+                </a:solidFill>
+                <a:latin typeface="Comic Sans MS" panose="030F0702030302020204" pitchFamily="66" charset="0"/>
+                <a:cs typeface="Times New Roman" panose="02020603050405020304" pitchFamily="18" charset="0"/>
+              </a:rPr>
+              <a:t>季节服装</a:t>
+            </a:r>
+          </a:p>
+        </p:txBody>
+      </p:sp>
+      <p:sp>
+        <p:nvSpPr>
+          <p:cNvPr id="153" name="文本框 152">
+            <a:extLst>
+              <a:ext uri="{FF2B5EF4-FFF2-40B4-BE49-F238E27FC236}">
+                <a16:creationId xmlns:a16="http://schemas.microsoft.com/office/drawing/2014/main" id="{49B7F7EF-24B8-5CFC-E5F6-3F761CE158CE}"/>
+              </a:ext>
+            </a:extLst>
+          </p:cNvPr>
+          <p:cNvSpPr txBox="1"/>
+          <p:nvPr/>
+        </p:nvSpPr>
+        <p:spPr>
+          <a:xfrm>
+            <a:off x="8326465" y="4478449"/>
+            <a:ext cx="920537" cy="230832"/>
+          </a:xfrm>
+          <a:prstGeom prst="rect">
+            <a:avLst/>
+          </a:prstGeom>
+          <a:noFill/>
+        </p:spPr>
+        <p:txBody>
+          <a:bodyPr wrap="square" rtlCol="0">
+            <a:spAutoFit/>
+          </a:bodyPr>
+          <a:lstStyle/>
+          <a:p>
+            <a:r>
+              <a:rPr lang="en-US" altLang="zh-CN" sz="900" b="1" i="1" dirty="0">
+                <a:solidFill>
+                  <a:schemeClr val="bg1"/>
+                </a:solidFill>
+                <a:latin typeface="Comic Sans MS" panose="030F0702030302020204" pitchFamily="66" charset="0"/>
+                <a:cs typeface="Times New Roman" panose="02020603050405020304" pitchFamily="18" charset="0"/>
+              </a:rPr>
+              <a:t>0 or 1,000</a:t>
+            </a:r>
+            <a:endParaRPr lang="zh-CN" altLang="en-US" sz="900" b="1" i="1" dirty="0">
+              <a:solidFill>
+                <a:schemeClr val="bg1"/>
+              </a:solidFill>
+              <a:latin typeface="Comic Sans MS" panose="030F0702030302020204" pitchFamily="66" charset="0"/>
+              <a:cs typeface="Times New Roman" panose="02020603050405020304" pitchFamily="18" charset="0"/>
+            </a:endParaRPr>
+          </a:p>
+        </p:txBody>
+      </p:sp>
+      <p:sp>
+        <p:nvSpPr>
+          <p:cNvPr id="154" name="任意多边形: 形状 153">
+            <a:extLst>
+              <a:ext uri="{FF2B5EF4-FFF2-40B4-BE49-F238E27FC236}">
+                <a16:creationId xmlns:a16="http://schemas.microsoft.com/office/drawing/2014/main" id="{DBD3C160-3103-C738-E374-17D2218E516B}"/>
+              </a:ext>
+            </a:extLst>
+          </p:cNvPr>
+          <p:cNvSpPr/>
+          <p:nvPr/>
+        </p:nvSpPr>
+        <p:spPr>
+          <a:xfrm>
+            <a:off x="6620706" y="4922618"/>
+            <a:ext cx="1859903" cy="521638"/>
+          </a:xfrm>
+          <a:custGeom>
+            <a:avLst/>
+            <a:gdLst>
+              <a:gd name="csX0" fmla="*/ 86941 w 1405771"/>
+              <a:gd name="csY0" fmla="*/ 0 h 521638"/>
+              <a:gd name="csX1" fmla="*/ 1405771 w 1405771"/>
+              <a:gd name="csY1" fmla="*/ 0 h 521638"/>
+              <a:gd name="csX2" fmla="*/ 1059236 w 1405771"/>
+              <a:gd name="csY2" fmla="*/ 521638 h 521638"/>
+              <a:gd name="csX3" fmla="*/ 86941 w 1405771"/>
+              <a:gd name="csY3" fmla="*/ 521638 h 521638"/>
+              <a:gd name="csX4" fmla="*/ 0 w 1405771"/>
+              <a:gd name="csY4" fmla="*/ 434697 h 521638"/>
+              <a:gd name="csX5" fmla="*/ 0 w 1405771"/>
+              <a:gd name="csY5" fmla="*/ 86941 h 521638"/>
+              <a:gd name="csX6" fmla="*/ 86941 w 1405771"/>
+              <a:gd name="csY6" fmla="*/ 0 h 521638"/>
+            </a:gdLst>
+            <a:ahLst/>
+            <a:cxnLst>
+              <a:cxn ang="0">
+                <a:pos x="csX0" y="csY0"/>
+              </a:cxn>
+              <a:cxn ang="0">
+                <a:pos x="csX1" y="csY1"/>
+              </a:cxn>
+              <a:cxn ang="0">
+                <a:pos x="csX2" y="csY2"/>
+              </a:cxn>
+              <a:cxn ang="0">
+                <a:pos x="csX3" y="csY3"/>
+              </a:cxn>
+              <a:cxn ang="0">
+                <a:pos x="csX4" y="csY4"/>
+              </a:cxn>
+              <a:cxn ang="0">
+                <a:pos x="csX5" y="csY5"/>
+              </a:cxn>
+              <a:cxn ang="0">
+                <a:pos x="csX6" y="csY6"/>
+              </a:cxn>
+            </a:cxnLst>
+            <a:rect l="l" t="t" r="r" b="b"/>
+            <a:pathLst>
+              <a:path w="1405771" h="521638">
+                <a:moveTo>
+                  <a:pt x="86941" y="0"/>
+                </a:moveTo>
+                <a:lnTo>
+                  <a:pt x="1405771" y="0"/>
+                </a:lnTo>
+                <a:lnTo>
+                  <a:pt x="1059236" y="521638"/>
+                </a:lnTo>
+                <a:lnTo>
+                  <a:pt x="86941" y="521638"/>
+                </a:lnTo>
+                <a:cubicBezTo>
+                  <a:pt x="38925" y="521638"/>
+                  <a:pt x="0" y="482713"/>
+                  <a:pt x="0" y="434697"/>
+                </a:cubicBezTo>
+                <a:lnTo>
+                  <a:pt x="0" y="86941"/>
+                </a:lnTo>
+                <a:cubicBezTo>
+                  <a:pt x="0" y="38925"/>
+                  <a:pt x="38925" y="0"/>
+                  <a:pt x="86941" y="0"/>
+                </a:cubicBezTo>
+                <a:close/>
+              </a:path>
+            </a:pathLst>
+          </a:custGeom>
+          <a:solidFill>
+            <a:srgbClr val="D92727"/>
+          </a:solidFill>
+          <a:ln>
+            <a:noFill/>
+          </a:ln>
+        </p:spPr>
+        <p:style>
+          <a:lnRef idx="2">
+            <a:schemeClr val="accent4">
+              <a:shade val="15000"/>
+            </a:schemeClr>
+          </a:lnRef>
+          <a:fillRef idx="1">
+            <a:schemeClr val="accent4"/>
+          </a:fillRef>
+          <a:effectRef idx="0">
+            <a:schemeClr val="accent4"/>
+          </a:effectRef>
+          <a:fontRef idx="minor">
+            <a:schemeClr val="lt1"/>
+          </a:fontRef>
+        </p:style>
+        <p:txBody>
+          <a:bodyPr wrap="square" rtlCol="0" anchor="ctr">
+            <a:noAutofit/>
+          </a:bodyPr>
+          <a:lstStyle/>
+          <a:p>
+            <a:pPr algn="ctr"/>
+            <a:endParaRPr lang="zh-CN" altLang="en-US" dirty="0"/>
+          </a:p>
+        </p:txBody>
+      </p:sp>
+      <p:sp>
+        <p:nvSpPr>
+          <p:cNvPr id="155" name="任意多边形: 形状 154">
+            <a:extLst>
+              <a:ext uri="{FF2B5EF4-FFF2-40B4-BE49-F238E27FC236}">
+                <a16:creationId xmlns:a16="http://schemas.microsoft.com/office/drawing/2014/main" id="{A4B1CE35-A375-3C17-DCD0-9A73D1C0D3FD}"/>
+              </a:ext>
+            </a:extLst>
+          </p:cNvPr>
+          <p:cNvSpPr/>
+          <p:nvPr/>
+        </p:nvSpPr>
+        <p:spPr>
+          <a:xfrm>
+            <a:off x="8016023" y="4922618"/>
+            <a:ext cx="1082547" cy="521638"/>
+          </a:xfrm>
+          <a:custGeom>
+            <a:avLst/>
+            <a:gdLst>
+              <a:gd name="csX0" fmla="*/ 346535 w 1082547"/>
+              <a:gd name="csY0" fmla="*/ 0 h 521638"/>
+              <a:gd name="csX1" fmla="*/ 995606 w 1082547"/>
+              <a:gd name="csY1" fmla="*/ 0 h 521638"/>
+              <a:gd name="csX2" fmla="*/ 1082547 w 1082547"/>
+              <a:gd name="csY2" fmla="*/ 86941 h 521638"/>
+              <a:gd name="csX3" fmla="*/ 1082547 w 1082547"/>
+              <a:gd name="csY3" fmla="*/ 434697 h 521638"/>
+              <a:gd name="csX4" fmla="*/ 995606 w 1082547"/>
+              <a:gd name="csY4" fmla="*/ 521638 h 521638"/>
+              <a:gd name="csX5" fmla="*/ 0 w 1082547"/>
+              <a:gd name="csY5" fmla="*/ 521638 h 521638"/>
+            </a:gdLst>
+            <a:ahLst/>
+            <a:cxnLst>
+              <a:cxn ang="0">
+                <a:pos x="csX0" y="csY0"/>
+              </a:cxn>
+              <a:cxn ang="0">
+                <a:pos x="csX1" y="csY1"/>
+              </a:cxn>
+              <a:cxn ang="0">
+                <a:pos x="csX2" y="csY2"/>
+              </a:cxn>
+              <a:cxn ang="0">
+                <a:pos x="csX3" y="csY3"/>
+              </a:cxn>
+              <a:cxn ang="0">
+                <a:pos x="csX4" y="csY4"/>
+              </a:cxn>
+              <a:cxn ang="0">
+                <a:pos x="csX5" y="csY5"/>
+              </a:cxn>
+            </a:cxnLst>
+            <a:rect l="l" t="t" r="r" b="b"/>
+            <a:pathLst>
+              <a:path w="1082547" h="521638">
+                <a:moveTo>
+                  <a:pt x="346535" y="0"/>
+                </a:moveTo>
+                <a:lnTo>
+                  <a:pt x="995606" y="0"/>
+                </a:lnTo>
+                <a:cubicBezTo>
+                  <a:pt x="1043622" y="0"/>
+                  <a:pt x="1082547" y="38925"/>
+                  <a:pt x="1082547" y="86941"/>
+                </a:cubicBezTo>
+                <a:lnTo>
+                  <a:pt x="1082547" y="434697"/>
+                </a:lnTo>
+                <a:cubicBezTo>
+                  <a:pt x="1082547" y="482713"/>
+                  <a:pt x="1043622" y="521638"/>
+                  <a:pt x="995606" y="521638"/>
+                </a:cubicBezTo>
+                <a:lnTo>
+                  <a:pt x="0" y="521638"/>
+                </a:lnTo>
+                <a:close/>
+              </a:path>
+            </a:pathLst>
+          </a:custGeom>
+          <a:solidFill>
+            <a:srgbClr val="FD9A69"/>
+          </a:solidFill>
+          <a:ln>
+            <a:noFill/>
+          </a:ln>
+        </p:spPr>
+        <p:style>
+          <a:lnRef idx="2">
+            <a:schemeClr val="accent4">
+              <a:shade val="15000"/>
+            </a:schemeClr>
+          </a:lnRef>
+          <a:fillRef idx="1">
+            <a:schemeClr val="accent4"/>
+          </a:fillRef>
+          <a:effectRef idx="0">
+            <a:schemeClr val="accent4"/>
+          </a:effectRef>
+          <a:fontRef idx="minor">
+            <a:schemeClr val="lt1"/>
+          </a:fontRef>
+        </p:style>
+        <p:txBody>
+          <a:bodyPr wrap="square" rtlCol="0" anchor="ctr">
+            <a:noAutofit/>
+          </a:bodyPr>
+          <a:lstStyle/>
+          <a:p>
+            <a:pPr algn="ctr"/>
+            <a:endParaRPr lang="zh-CN" altLang="en-US"/>
+          </a:p>
+        </p:txBody>
+      </p:sp>
+      <p:sp>
+        <p:nvSpPr>
+          <p:cNvPr id="156" name="文本框 155">
+            <a:extLst>
+              <a:ext uri="{FF2B5EF4-FFF2-40B4-BE49-F238E27FC236}">
+                <a16:creationId xmlns:a16="http://schemas.microsoft.com/office/drawing/2014/main" id="{D2678A13-E458-673A-ECC5-CB3B50F6DEC3}"/>
+              </a:ext>
+            </a:extLst>
+          </p:cNvPr>
+          <p:cNvSpPr txBox="1"/>
+          <p:nvPr/>
+        </p:nvSpPr>
+        <p:spPr>
+          <a:xfrm>
+            <a:off x="6642394" y="5046110"/>
+            <a:ext cx="1386328" cy="230832"/>
+          </a:xfrm>
+          <a:prstGeom prst="rect">
+            <a:avLst/>
+          </a:prstGeom>
+          <a:noFill/>
+        </p:spPr>
+        <p:txBody>
+          <a:bodyPr wrap="square" rtlCol="0">
+            <a:spAutoFit/>
+          </a:bodyPr>
+          <a:lstStyle/>
+          <a:p>
+            <a:r>
+              <a:rPr lang="zh-CN" altLang="en-US" sz="900" b="1" dirty="0">
+                <a:solidFill>
+                  <a:schemeClr val="bg1"/>
+                </a:solidFill>
+                <a:latin typeface="Comic Sans MS" panose="030F0702030302020204" pitchFamily="66" charset="0"/>
+                <a:cs typeface="Times New Roman" panose="02020603050405020304" pitchFamily="18" charset="0"/>
+              </a:rPr>
+              <a:t>速战型</a:t>
+            </a:r>
+          </a:p>
+        </p:txBody>
+      </p:sp>
+      <p:sp>
+        <p:nvSpPr>
+          <p:cNvPr id="157" name="文本框 156">
+            <a:extLst>
+              <a:ext uri="{FF2B5EF4-FFF2-40B4-BE49-F238E27FC236}">
+                <a16:creationId xmlns:a16="http://schemas.microsoft.com/office/drawing/2014/main" id="{93A43622-7CCA-DF95-A497-E8BA711A2919}"/>
+              </a:ext>
+            </a:extLst>
+          </p:cNvPr>
+          <p:cNvSpPr txBox="1"/>
+          <p:nvPr/>
+        </p:nvSpPr>
+        <p:spPr>
+          <a:xfrm>
+            <a:off x="8326465" y="5068021"/>
+            <a:ext cx="920537" cy="230832"/>
+          </a:xfrm>
+          <a:prstGeom prst="rect">
+            <a:avLst/>
+          </a:prstGeom>
+          <a:noFill/>
+        </p:spPr>
+        <p:txBody>
+          <a:bodyPr wrap="square" rtlCol="0">
+            <a:spAutoFit/>
+          </a:bodyPr>
+          <a:lstStyle/>
+          <a:p>
+            <a:r>
+              <a:rPr lang="en-US" altLang="zh-CN" sz="900" b="1" i="1" dirty="0">
+                <a:solidFill>
+                  <a:schemeClr val="bg1"/>
+                </a:solidFill>
+                <a:latin typeface="Comic Sans MS" panose="030F0702030302020204" pitchFamily="66" charset="0"/>
+                <a:cs typeface="Times New Roman" panose="02020603050405020304" pitchFamily="18" charset="0"/>
+              </a:rPr>
+              <a:t>0 or 1,000</a:t>
+            </a:r>
+            <a:endParaRPr lang="zh-CN" altLang="en-US" sz="900" b="1" i="1" dirty="0">
+              <a:solidFill>
+                <a:schemeClr val="bg1"/>
+              </a:solidFill>
+              <a:latin typeface="Comic Sans MS" panose="030F0702030302020204" pitchFamily="66" charset="0"/>
+              <a:cs typeface="Times New Roman" panose="02020603050405020304" pitchFamily="18" charset="0"/>
+            </a:endParaRPr>
+          </a:p>
+        </p:txBody>
+      </p:sp>
     </p:spTree>
     <p:extLst>
       <p:ext uri="{BB962C8B-B14F-4D97-AF65-F5344CB8AC3E}">
         <p14:creationId xmlns:p14="http://schemas.microsoft.com/office/powerpoint/2010/main" val="2981540409"/>
+      </p:ext>
+    </p:extLst>
+  </p:cSld>
+  <p:clrMapOvr>
+    <a:masterClrMapping/>
+  </p:clrMapOvr>
+</p:sld>
+</file>
+
+<file path=ppt/slides/slide2.xml><?xml version="1.0" encoding="utf-8"?>
+<p:sld xmlns:a="http://schemas.openxmlformats.org/drawingml/2006/main" xmlns:r="http://schemas.openxmlformats.org/officeDocument/2006/relationships" xmlns:p="http://schemas.openxmlformats.org/presentationml/2006/main">
+  <p:cSld>
+    <p:spTree>
+      <p:nvGrpSpPr>
+        <p:cNvPr id="1" name=""/>
+        <p:cNvGrpSpPr/>
+        <p:nvPr/>
+      </p:nvGrpSpPr>
+      <p:grpSpPr>
+        <a:xfrm>
+          <a:off x="0" y="0"/>
+          <a:ext cx="0" cy="0"/>
+          <a:chOff x="0" y="0"/>
+          <a:chExt cx="0" cy="0"/>
+        </a:xfrm>
+      </p:grpSpPr>
+      <p:pic>
+        <p:nvPicPr>
+          <p:cNvPr id="14" name="图片 13">
+            <a:extLst>
+              <a:ext uri="{FF2B5EF4-FFF2-40B4-BE49-F238E27FC236}">
+                <a16:creationId xmlns:a16="http://schemas.microsoft.com/office/drawing/2014/main" id="{B60397C7-CAFD-87A4-51BF-C9A58FA7B820}"/>
+              </a:ext>
+            </a:extLst>
+          </p:cNvPr>
+          <p:cNvPicPr>
+            <a:picLocks noChangeAspect="1"/>
+          </p:cNvPicPr>
+          <p:nvPr/>
+        </p:nvPicPr>
+        <p:blipFill>
+          <a:blip r:embed="rId2">
+            <a:extLst>
+              <a:ext uri="{BEBA8EAE-BF5A-486C-A8C5-ECC9F3942E4B}">
+                <a14:imgProps xmlns:a14="http://schemas.microsoft.com/office/drawing/2010/main">
+                  <a14:imgLayer r:embed="rId3">
+                    <a14:imgEffect>
+                      <a14:backgroundRemoval t="4932" b="96484" l="7764" r="96191">
+                        <a14:foregroundMark x1="16504" y1="5469" x2="28516" y2="15771"/>
+                        <a14:foregroundMark x1="28516" y1="15771" x2="24756" y2="5371"/>
+                        <a14:foregroundMark x1="12988" y1="9424" x2="6702" y2="19628"/>
+                        <a14:foregroundMark x1="5216" y1="61664" x2="5236" y2="60884"/>
+                        <a14:foregroundMark x1="5285" y1="58899" x2="5320" y2="57519"/>
+                        <a14:foregroundMark x1="6672" y1="77862" x2="8518" y2="80816"/>
+                        <a14:foregroundMark x1="13890" y1="87053" x2="19423" y2="89894"/>
+                        <a14:foregroundMark x1="57447" y1="89160" x2="58936" y2="89014"/>
+                        <a14:foregroundMark x1="58936" y1="89014" x2="71777" y2="96191"/>
+                        <a14:foregroundMark x1="71777" y1="96191" x2="82682" y2="97235"/>
+                        <a14:foregroundMark x1="94440" y1="86984" x2="95215" y2="85938"/>
+                        <a14:foregroundMark x1="94064" y1="87492" x2="94440" y2="86985"/>
+                        <a14:foregroundMark x1="96698" y1="81773" x2="97154" y2="80491"/>
+                        <a14:foregroundMark x1="95215" y1="85938" x2="95835" y2="84197"/>
+                        <a14:foregroundMark x1="97470" y1="68177" x2="96988" y2="66549"/>
+                        <a14:foregroundMark x1="94139" y1="14422" x2="93750" y2="13184"/>
+                        <a14:foregroundMark x1="93750" y1="13184" x2="92813" y2="12338"/>
+                        <a14:foregroundMark x1="83789" y1="4199" x2="11377" y2="8301"/>
+                        <a14:foregroundMark x1="11377" y1="8301" x2="9473" y2="10596"/>
+                        <a14:foregroundMark x1="46582" y1="7959" x2="61230" y2="22705"/>
+                        <a14:foregroundMark x1="61230" y1="22705" x2="75537" y2="24512"/>
+                        <a14:foregroundMark x1="75537" y1="24512" x2="83203" y2="34912"/>
+                        <a14:foregroundMark x1="83203" y1="34912" x2="84668" y2="46045"/>
+                        <a14:foregroundMark x1="84668" y1="46045" x2="91427" y2="37458"/>
+                        <a14:foregroundMark x1="91691" y1="24912" x2="89111" y2="15820"/>
+                        <a14:foregroundMark x1="91856" y1="25492" x2="91725" y2="25032"/>
+                        <a14:foregroundMark x1="92794" y1="28800" x2="92580" y2="28046"/>
+                        <a14:foregroundMark x1="89111" y1="15820" x2="75391" y2="4980"/>
+                        <a14:foregroundMark x1="75391" y1="4980" x2="48389" y2="6787"/>
+                        <a14:foregroundMark x1="70068" y1="53418" x2="54541" y2="67920"/>
+                        <a14:foregroundMark x1="54541" y1="67920" x2="52197" y2="78174"/>
+                        <a14:foregroundMark x1="52197" y1="78174" x2="62451" y2="90430"/>
+                        <a14:foregroundMark x1="62451" y1="90430" x2="71680" y2="95020"/>
+                        <a14:foregroundMark x1="71680" y1="95020" x2="86426" y2="91309"/>
+                        <a14:foregroundMark x1="86426" y1="91309" x2="93555" y2="77930"/>
+                        <a14:foregroundMark x1="93555" y1="77930" x2="91895" y2="62695"/>
+                        <a14:foregroundMark x1="91895" y1="62695" x2="82080" y2="52734"/>
+                        <a14:foregroundMark x1="82080" y1="52734" x2="68604" y2="53369"/>
+                        <a14:foregroundMark x1="68604" y1="53369" x2="67871" y2="53711"/>
+                        <a14:foregroundMark x1="87061" y1="66357" x2="76611" y2="67432"/>
+                        <a14:foregroundMark x1="76611" y1="67432" x2="63281" y2="73730"/>
+                        <a14:foregroundMark x1="63281" y1="73730" x2="60352" y2="85303"/>
+                        <a14:foregroundMark x1="60352" y1="85303" x2="79834" y2="91260"/>
+                        <a14:foregroundMark x1="79834" y1="91260" x2="90967" y2="86377"/>
+                        <a14:foregroundMark x1="90967" y1="86377" x2="91602" y2="72607"/>
+                        <a14:foregroundMark x1="91602" y1="72607" x2="84961" y2="66504"/>
+                        <a14:foregroundMark x1="82764" y1="68994" x2="71533" y2="68896"/>
+                        <a14:foregroundMark x1="71533" y1="68896" x2="64111" y2="77881"/>
+                        <a14:foregroundMark x1="64111" y1="77881" x2="82471" y2="80420"/>
+                        <a14:foregroundMark x1="82471" y1="80420" x2="86230" y2="69824"/>
+                        <a14:foregroundMark x1="86230" y1="69824" x2="74951" y2="68701"/>
+                        <a14:foregroundMark x1="74951" y1="68701" x2="72314" y2="69238"/>
+                        <a14:foregroundMark x1="90869" y1="66895" x2="94287" y2="77393"/>
+                        <a14:foregroundMark x1="94287" y1="77393" x2="93066" y2="67676"/>
+                        <a14:foregroundMark x1="72949" y1="74219" x2="65381" y2="72754"/>
+                        <a14:foregroundMark x1="61719" y1="79053" x2="8301" y2="77002"/>
+                        <a14:foregroundMark x1="8301" y1="77002" x2="17480" y2="86816"/>
+                        <a14:foregroundMark x1="17480" y1="86816" x2="29363" y2="88000"/>
+                        <a14:foregroundMark x1="51385" y1="88403" x2="59180" y2="86084"/>
+                        <a14:foregroundMark x1="59180" y1="86084" x2="54297" y2="78906"/>
+                        <a14:foregroundMark x1="7764" y1="16211" x2="18506" y2="18359"/>
+                        <a14:foregroundMark x1="18506" y1="18359" x2="42676" y2="33057"/>
+                        <a14:foregroundMark x1="42676" y1="33057" x2="52148" y2="56494"/>
+                        <a14:foregroundMark x1="52148" y1="56494" x2="32715" y2="48145"/>
+                        <a14:foregroundMark x1="32715" y1="48145" x2="34033" y2="30176"/>
+                        <a14:foregroundMark x1="34033" y1="30176" x2="35352" y2="29541"/>
+                        <a14:foregroundMark x1="71143" y1="92090" x2="80277" y2="95441"/>
+                        <a14:foregroundMark x1="80431" y1="95407" x2="71143" y2="91699"/>
+                        <a14:foregroundMark x1="18750" y1="17529" x2="18164" y2="32178"/>
+                        <a14:foregroundMark x1="18164" y1="32178" x2="38672" y2="51758"/>
+                        <a14:foregroundMark x1="38672" y1="51758" x2="62793" y2="35059"/>
+                        <a14:foregroundMark x1="62793" y1="35059" x2="63135" y2="32275"/>
+                        <a14:foregroundMark x1="27490" y1="61035" x2="24463" y2="53809"/>
+                        <a14:foregroundMark x1="13916" y1="40381" x2="31787" y2="62061"/>
+                        <a14:foregroundMark x1="31787" y1="62061" x2="32080" y2="62061"/>
+                        <a14:foregroundMark x1="91211" y1="12646" x2="93262" y2="15234"/>
+                        <a14:foregroundMark x1="89844" y1="10742" x2="91797" y2="13477"/>
+                        <a14:foregroundMark x1="94971" y1="66455" x2="96191" y2="71924"/>
+                        <a14:backgroundMark x1="8789" y1="8496" x2="6592" y2="11621"/>
+                        <a14:backgroundMark x1="10205" y1="7769" x2="2783" y2="3027"/>
+                        <a14:backgroundMark x1="2783" y1="3027" x2="13672" y2="4346"/>
+                        <a14:backgroundMark x1="10763" y1="7371" x2="10472" y2="7674"/>
+                        <a14:backgroundMark x1="13672" y1="4346" x2="10879" y2="7250"/>
+                        <a14:backgroundMark x1="5127" y1="60889" x2="5615" y2="72949"/>
+                        <a14:backgroundMark x1="5615" y1="72949" x2="5518" y2="65723"/>
+                        <a14:backgroundMark x1="3174" y1="62598" x2="4102" y2="59180"/>
+                        <a14:backgroundMark x1="5518" y1="62598" x2="5273" y2="57373"/>
+                        <a14:backgroundMark x1="5273" y1="58936" x2="5957" y2="50439"/>
+                        <a14:backgroundMark x1="5273" y1="54199" x2="4492" y2="45996"/>
+                        <a14:backgroundMark x1="5518" y1="20117" x2="6445" y2="51074"/>
+                        <a14:backgroundMark x1="5811" y1="21484" x2="6201" y2="31885"/>
+                        <a14:backgroundMark x1="6201" y1="31885" x2="6299" y2="31982"/>
+                        <a14:backgroundMark x1="5957" y1="19531" x2="5566" y2="22510"/>
+                        <a14:backgroundMark x1="5469" y1="29346" x2="6152" y2="34424"/>
+                        <a14:backgroundMark x1="5420" y1="35498" x2="5127" y2="45801"/>
+                        <a14:backgroundMark x1="5127" y1="45801" x2="5322" y2="35352"/>
+                        <a14:backgroundMark x1="5322" y1="35352" x2="5225" y2="35303"/>
+                        <a14:backgroundMark x1="5225" y1="45215" x2="5273" y2="52393"/>
+                        <a14:backgroundMark x1="5762" y1="50098" x2="5566" y2="54346"/>
+                        <a14:backgroundMark x1="5322" y1="34131" x2="5566" y2="37988"/>
+                        <a14:backgroundMark x1="6445" y1="20020" x2="6445" y2="20020"/>
+                        <a14:backgroundMark x1="6641" y1="20068" x2="6641" y2="20068"/>
+                        <a14:backgroundMark x1="5664" y1="70557" x2="5420" y2="78027"/>
+                        <a14:backgroundMark x1="7764" y1="81787" x2="11621" y2="87012"/>
+                        <a14:backgroundMark x1="7910" y1="81299" x2="13818" y2="87109"/>
+                        <a14:backgroundMark x1="88867" y1="94434" x2="82666" y2="97217"/>
+                        <a14:backgroundMark x1="86719" y1="96143" x2="84717" y2="97949"/>
+                        <a14:backgroundMark x1="83887" y1="95801" x2="76025" y2="97559"/>
+                        <a14:backgroundMark x1="87793" y1="95264" x2="94434" y2="86572"/>
+                        <a14:backgroundMark x1="94434" y1="86572" x2="97070" y2="80029"/>
+                        <a14:backgroundMark x1="96240" y1="87061" x2="94629" y2="86670"/>
+                        <a14:backgroundMark x1="94482" y1="86865" x2="97119" y2="79492"/>
+                        <a14:backgroundMark x1="16553" y1="91406" x2="30908" y2="88672"/>
+                        <a14:backgroundMark x1="30908" y1="88672" x2="41992" y2="90234"/>
+                        <a14:backgroundMark x1="41992" y1="90234" x2="54053" y2="89502"/>
+                        <a14:backgroundMark x1="54053" y1="89502" x2="38330" y2="89160"/>
+                        <a14:backgroundMark x1="19141" y1="89648" x2="22656" y2="88623"/>
+                        <a14:backgroundMark x1="52930" y1="89453" x2="57324" y2="89355"/>
+                        <a14:backgroundMark x1="93907" y1="14802" x2="92920" y2="25146"/>
+                        <a14:backgroundMark x1="92920" y1="25146" x2="96826" y2="36768"/>
+                        <a14:backgroundMark x1="96826" y1="36768" x2="93701" y2="56934"/>
+                        <a14:backgroundMark x1="93701" y1="56934" x2="93896" y2="42920"/>
+                        <a14:backgroundMark x1="93896" y1="42920" x2="98291" y2="36230"/>
+                        <a14:backgroundMark x1="95605" y1="19873" x2="92627" y2="37061"/>
+                        <a14:backgroundMark x1="92627" y1="37061" x2="95752" y2="57861"/>
+                        <a14:backgroundMark x1="95752" y1="57861" x2="94287" y2="61670"/>
+                        <a14:backgroundMark x1="94971" y1="63818" x2="95264" y2="61865"/>
+                        <a14:backgroundMark x1="94922" y1="63525" x2="95703" y2="60840"/>
+                        <a14:backgroundMark x1="95020" y1="62939" x2="94434" y2="62988"/>
+                        <a14:backgroundMark x1="94922" y1="62744" x2="95264" y2="62207"/>
+                        <a14:backgroundMark x1="95605" y1="61670" x2="95361" y2="62305"/>
+                        <a14:backgroundMark x1="96240" y1="32861" x2="96777" y2="20068"/>
+                        <a14:backgroundMark x1="96777" y1="20068" x2="92969" y2="18311"/>
+                        <a14:backgroundMark x1="90992" y1="10212" x2="91895" y2="10889"/>
+                        <a14:backgroundMark x1="83496" y1="4590" x2="90859" y2="10112"/>
+                        <a14:backgroundMark x1="90600" y1="10273" x2="87891" y2="8984"/>
+                        <a14:backgroundMark x1="91895" y1="10889" x2="91260" y2="10587"/>
+                        <a14:backgroundMark x1="91764" y1="11292" x2="92529" y2="11572"/>
+                        <a14:backgroundMark x1="93258" y1="15237" x2="97607" y2="21729"/>
+                        <a14:backgroundMark x1="97607" y1="21729" x2="96094" y2="32080"/>
+                        <a14:backgroundMark x1="96094" y1="32080" x2="96777" y2="31445"/>
+                        <a14:backgroundMark x1="95020" y1="62793" x2="95313" y2="65381"/>
+                        <a14:backgroundMark x1="95703" y1="48926" x2="96582" y2="53613"/>
+                        <a14:backgroundMark x1="96853" y1="71779" x2="97070" y2="72607"/>
+                        <a14:backgroundMark x1="94629" y1="63281" x2="95433" y2="66353"/>
+                        <a14:backgroundMark x1="95898" y1="65283" x2="95801" y2="62646"/>
+                        <a14:backgroundMark x1="95898" y1="63770" x2="96484" y2="66650"/>
+                        <a14:backgroundMark x1="96191" y1="60791" x2="94971" y2="60889"/>
+                        <a14:backgroundMark x1="96045" y1="64502" x2="97070" y2="66357"/>
+                        <a14:backgroundMark x1="96533" y1="65918" x2="96758" y2="68746"/>
+                        <a14:backgroundMark x1="97217" y1="66357" x2="97559" y2="70703"/>
+                        <a14:backgroundMark x1="96924" y1="66357" x2="96924" y2="70215"/>
+                        <a14:backgroundMark x1="97070" y1="65723" x2="96951" y2="69612"/>
+                        <a14:backgroundMark x1="97900" y1="68115" x2="99658" y2="80273"/>
+                        <a14:backgroundMark x1="99658" y1="80273" x2="98438" y2="68652"/>
+                        <a14:backgroundMark x1="98438" y1="68652" x2="98096" y2="80518"/>
+                        <a14:backgroundMark x1="98096" y1="80518" x2="97656" y2="79297"/>
+                        <a14:backgroundMark x1="97119" y1="81982" x2="95898" y2="84229"/>
+                        <a14:backgroundMark x1="96924" y1="84375" x2="97900" y2="79004"/>
+                      </a14:backgroundRemoval>
+                    </a14:imgEffect>
+                  </a14:imgLayer>
+                </a14:imgProps>
+              </a:ext>
+              <a:ext uri="{28A0092B-C50C-407E-A947-70E740481C1C}">
+                <a14:useLocalDpi xmlns:a14="http://schemas.microsoft.com/office/drawing/2010/main" val="0"/>
+              </a:ext>
+            </a:extLst>
+          </a:blip>
+          <a:stretch>
+            <a:fillRect/>
+          </a:stretch>
+        </p:blipFill>
+        <p:spPr>
+          <a:xfrm>
+            <a:off x="5772278" y="1325573"/>
+            <a:ext cx="4697295" cy="4697295"/>
+          </a:xfrm>
+          <a:prstGeom prst="rect">
+            <a:avLst/>
+          </a:prstGeom>
+        </p:spPr>
+      </p:pic>
+    </p:spTree>
+    <p:extLst>
+      <p:ext uri="{BB962C8B-B14F-4D97-AF65-F5344CB8AC3E}">
+        <p14:creationId xmlns:p14="http://schemas.microsoft.com/office/powerpoint/2010/main" val="3457332725"/>
       </p:ext>
     </p:extLst>
   </p:cSld>

--- a/icons.pptx
+++ b/icons.pptx
@@ -105,6 +105,11 @@
       </a:defRPr>
     </a:lvl9pPr>
   </p:defaultTextStyle>
+  <p:extLst>
+    <p:ext uri="{EFAFB233-063F-42B5-8137-9DF3F51BA10A}">
+      <p15:sldGuideLst xmlns:p15="http://schemas.microsoft.com/office/powerpoint/2012/main"/>
+    </p:ext>
+  </p:extLst>
 </p:presentation>
 </file>
 
@@ -255,7 +260,7 @@
           <a:p>
             <a:fld id="{6D779CB0-7415-427D-B2A0-B916689A0D92}" type="datetimeFigureOut">
               <a:rPr lang="zh-CN" altLang="en-US" smtClean="0"/>
-              <a:t>2025/12/20</a:t>
+              <a:t>2026/2/27</a:t>
             </a:fld>
             <a:endParaRPr lang="zh-CN" altLang="en-US"/>
           </a:p>
@@ -453,7 +458,7 @@
           <a:p>
             <a:fld id="{6D779CB0-7415-427D-B2A0-B916689A0D92}" type="datetimeFigureOut">
               <a:rPr lang="zh-CN" altLang="en-US" smtClean="0"/>
-              <a:t>2025/12/20</a:t>
+              <a:t>2026/2/27</a:t>
             </a:fld>
             <a:endParaRPr lang="zh-CN" altLang="en-US"/>
           </a:p>
@@ -661,7 +666,7 @@
           <a:p>
             <a:fld id="{6D779CB0-7415-427D-B2A0-B916689A0D92}" type="datetimeFigureOut">
               <a:rPr lang="zh-CN" altLang="en-US" smtClean="0"/>
-              <a:t>2025/12/20</a:t>
+              <a:t>2026/2/27</a:t>
             </a:fld>
             <a:endParaRPr lang="zh-CN" altLang="en-US"/>
           </a:p>
@@ -859,7 +864,7 @@
           <a:p>
             <a:fld id="{6D779CB0-7415-427D-B2A0-B916689A0D92}" type="datetimeFigureOut">
               <a:rPr lang="zh-CN" altLang="en-US" smtClean="0"/>
-              <a:t>2025/12/20</a:t>
+              <a:t>2026/2/27</a:t>
             </a:fld>
             <a:endParaRPr lang="zh-CN" altLang="en-US"/>
           </a:p>
@@ -1134,7 +1139,7 @@
           <a:p>
             <a:fld id="{6D779CB0-7415-427D-B2A0-B916689A0D92}" type="datetimeFigureOut">
               <a:rPr lang="zh-CN" altLang="en-US" smtClean="0"/>
-              <a:t>2025/12/20</a:t>
+              <a:t>2026/2/27</a:t>
             </a:fld>
             <a:endParaRPr lang="zh-CN" altLang="en-US"/>
           </a:p>
@@ -1399,7 +1404,7 @@
           <a:p>
             <a:fld id="{6D779CB0-7415-427D-B2A0-B916689A0D92}" type="datetimeFigureOut">
               <a:rPr lang="zh-CN" altLang="en-US" smtClean="0"/>
-              <a:t>2025/12/20</a:t>
+              <a:t>2026/2/27</a:t>
             </a:fld>
             <a:endParaRPr lang="zh-CN" altLang="en-US"/>
           </a:p>
@@ -1811,7 +1816,7 @@
           <a:p>
             <a:fld id="{6D779CB0-7415-427D-B2A0-B916689A0D92}" type="datetimeFigureOut">
               <a:rPr lang="zh-CN" altLang="en-US" smtClean="0"/>
-              <a:t>2025/12/20</a:t>
+              <a:t>2026/2/27</a:t>
             </a:fld>
             <a:endParaRPr lang="zh-CN" altLang="en-US"/>
           </a:p>
@@ -1952,7 +1957,7 @@
           <a:p>
             <a:fld id="{6D779CB0-7415-427D-B2A0-B916689A0D92}" type="datetimeFigureOut">
               <a:rPr lang="zh-CN" altLang="en-US" smtClean="0"/>
-              <a:t>2025/12/20</a:t>
+              <a:t>2026/2/27</a:t>
             </a:fld>
             <a:endParaRPr lang="zh-CN" altLang="en-US"/>
           </a:p>
@@ -2065,7 +2070,7 @@
           <a:p>
             <a:fld id="{6D779CB0-7415-427D-B2A0-B916689A0D92}" type="datetimeFigureOut">
               <a:rPr lang="zh-CN" altLang="en-US" smtClean="0"/>
-              <a:t>2025/12/20</a:t>
+              <a:t>2026/2/27</a:t>
             </a:fld>
             <a:endParaRPr lang="zh-CN" altLang="en-US"/>
           </a:p>
@@ -2376,7 +2381,7 @@
           <a:p>
             <a:fld id="{6D779CB0-7415-427D-B2A0-B916689A0D92}" type="datetimeFigureOut">
               <a:rPr lang="zh-CN" altLang="en-US" smtClean="0"/>
-              <a:t>2025/12/20</a:t>
+              <a:t>2026/2/27</a:t>
             </a:fld>
             <a:endParaRPr lang="zh-CN" altLang="en-US"/>
           </a:p>
@@ -2664,7 +2669,7 @@
           <a:p>
             <a:fld id="{6D779CB0-7415-427D-B2A0-B916689A0D92}" type="datetimeFigureOut">
               <a:rPr lang="zh-CN" altLang="en-US" smtClean="0"/>
-              <a:t>2025/12/20</a:t>
+              <a:t>2026/2/27</a:t>
             </a:fld>
             <a:endParaRPr lang="zh-CN" altLang="en-US"/>
           </a:p>
@@ -2905,7 +2910,7 @@
           <a:p>
             <a:fld id="{6D779CB0-7415-427D-B2A0-B916689A0D92}" type="datetimeFigureOut">
               <a:rPr lang="zh-CN" altLang="en-US" smtClean="0"/>
-              <a:t>2025/12/20</a:t>
+              <a:t>2026/2/27</a:t>
             </a:fld>
             <a:endParaRPr lang="zh-CN" altLang="en-US"/>
           </a:p>
@@ -10768,6 +10773,1436 @@
         <p:spPr>
           <a:xfrm>
             <a:off x="8326465" y="5068021"/>
+            <a:ext cx="920537" cy="230832"/>
+          </a:xfrm>
+          <a:prstGeom prst="rect">
+            <a:avLst/>
+          </a:prstGeom>
+          <a:noFill/>
+        </p:spPr>
+        <p:txBody>
+          <a:bodyPr wrap="square" rtlCol="0">
+            <a:spAutoFit/>
+          </a:bodyPr>
+          <a:lstStyle/>
+          <a:p>
+            <a:r>
+              <a:rPr lang="en-US" altLang="zh-CN" sz="900" b="1" i="1" dirty="0">
+                <a:solidFill>
+                  <a:schemeClr val="bg1"/>
+                </a:solidFill>
+                <a:latin typeface="Comic Sans MS" panose="030F0702030302020204" pitchFamily="66" charset="0"/>
+                <a:cs typeface="Times New Roman" panose="02020603050405020304" pitchFamily="18" charset="0"/>
+              </a:rPr>
+              <a:t>0 or 1,000</a:t>
+            </a:r>
+            <a:endParaRPr lang="zh-CN" altLang="en-US" sz="900" b="1" i="1" dirty="0">
+              <a:solidFill>
+                <a:schemeClr val="bg1"/>
+              </a:solidFill>
+              <a:latin typeface="Comic Sans MS" panose="030F0702030302020204" pitchFamily="66" charset="0"/>
+              <a:cs typeface="Times New Roman" panose="02020603050405020304" pitchFamily="18" charset="0"/>
+            </a:endParaRPr>
+          </a:p>
+        </p:txBody>
+      </p:sp>
+      <p:sp>
+        <p:nvSpPr>
+          <p:cNvPr id="2" name="任意多边形: 形状 1">
+            <a:extLst>
+              <a:ext uri="{FF2B5EF4-FFF2-40B4-BE49-F238E27FC236}">
+                <a16:creationId xmlns:a16="http://schemas.microsoft.com/office/drawing/2014/main" id="{E30FB135-BA59-5843-10C1-CA77CBFB7796}"/>
+              </a:ext>
+            </a:extLst>
+          </p:cNvPr>
+          <p:cNvSpPr/>
+          <p:nvPr/>
+        </p:nvSpPr>
+        <p:spPr>
+          <a:xfrm>
+            <a:off x="9396313" y="533912"/>
+            <a:ext cx="1859903" cy="521638"/>
+          </a:xfrm>
+          <a:custGeom>
+            <a:avLst/>
+            <a:gdLst>
+              <a:gd name="csX0" fmla="*/ 86941 w 1405771"/>
+              <a:gd name="csY0" fmla="*/ 0 h 521638"/>
+              <a:gd name="csX1" fmla="*/ 1405771 w 1405771"/>
+              <a:gd name="csY1" fmla="*/ 0 h 521638"/>
+              <a:gd name="csX2" fmla="*/ 1059236 w 1405771"/>
+              <a:gd name="csY2" fmla="*/ 521638 h 521638"/>
+              <a:gd name="csX3" fmla="*/ 86941 w 1405771"/>
+              <a:gd name="csY3" fmla="*/ 521638 h 521638"/>
+              <a:gd name="csX4" fmla="*/ 0 w 1405771"/>
+              <a:gd name="csY4" fmla="*/ 434697 h 521638"/>
+              <a:gd name="csX5" fmla="*/ 0 w 1405771"/>
+              <a:gd name="csY5" fmla="*/ 86941 h 521638"/>
+              <a:gd name="csX6" fmla="*/ 86941 w 1405771"/>
+              <a:gd name="csY6" fmla="*/ 0 h 521638"/>
+            </a:gdLst>
+            <a:ahLst/>
+            <a:cxnLst>
+              <a:cxn ang="0">
+                <a:pos x="csX0" y="csY0"/>
+              </a:cxn>
+              <a:cxn ang="0">
+                <a:pos x="csX1" y="csY1"/>
+              </a:cxn>
+              <a:cxn ang="0">
+                <a:pos x="csX2" y="csY2"/>
+              </a:cxn>
+              <a:cxn ang="0">
+                <a:pos x="csX3" y="csY3"/>
+              </a:cxn>
+              <a:cxn ang="0">
+                <a:pos x="csX4" y="csY4"/>
+              </a:cxn>
+              <a:cxn ang="0">
+                <a:pos x="csX5" y="csY5"/>
+              </a:cxn>
+              <a:cxn ang="0">
+                <a:pos x="csX6" y="csY6"/>
+              </a:cxn>
+            </a:cxnLst>
+            <a:rect l="l" t="t" r="r" b="b"/>
+            <a:pathLst>
+              <a:path w="1405771" h="521638">
+                <a:moveTo>
+                  <a:pt x="86941" y="0"/>
+                </a:moveTo>
+                <a:lnTo>
+                  <a:pt x="1405771" y="0"/>
+                </a:lnTo>
+                <a:lnTo>
+                  <a:pt x="1059236" y="521638"/>
+                </a:lnTo>
+                <a:lnTo>
+                  <a:pt x="86941" y="521638"/>
+                </a:lnTo>
+                <a:cubicBezTo>
+                  <a:pt x="38925" y="521638"/>
+                  <a:pt x="0" y="482713"/>
+                  <a:pt x="0" y="434697"/>
+                </a:cubicBezTo>
+                <a:lnTo>
+                  <a:pt x="0" y="86941"/>
+                </a:lnTo>
+                <a:cubicBezTo>
+                  <a:pt x="0" y="38925"/>
+                  <a:pt x="38925" y="0"/>
+                  <a:pt x="86941" y="0"/>
+                </a:cubicBezTo>
+                <a:close/>
+              </a:path>
+            </a:pathLst>
+          </a:custGeom>
+          <a:solidFill>
+            <a:srgbClr val="D92727"/>
+          </a:solidFill>
+          <a:ln>
+            <a:noFill/>
+          </a:ln>
+        </p:spPr>
+        <p:style>
+          <a:lnRef idx="2">
+            <a:schemeClr val="accent4">
+              <a:shade val="15000"/>
+            </a:schemeClr>
+          </a:lnRef>
+          <a:fillRef idx="1">
+            <a:schemeClr val="accent4"/>
+          </a:fillRef>
+          <a:effectRef idx="0">
+            <a:schemeClr val="accent4"/>
+          </a:effectRef>
+          <a:fontRef idx="minor">
+            <a:schemeClr val="lt1"/>
+          </a:fontRef>
+        </p:style>
+        <p:txBody>
+          <a:bodyPr wrap="square" rtlCol="0" anchor="ctr">
+            <a:noAutofit/>
+          </a:bodyPr>
+          <a:lstStyle/>
+          <a:p>
+            <a:pPr algn="ctr"/>
+            <a:endParaRPr lang="zh-CN" altLang="en-US" dirty="0"/>
+          </a:p>
+        </p:txBody>
+      </p:sp>
+      <p:sp>
+        <p:nvSpPr>
+          <p:cNvPr id="3" name="任意多边形: 形状 2">
+            <a:extLst>
+              <a:ext uri="{FF2B5EF4-FFF2-40B4-BE49-F238E27FC236}">
+                <a16:creationId xmlns:a16="http://schemas.microsoft.com/office/drawing/2014/main" id="{6BCF02B4-29AF-584F-2BBA-50E0A44E457A}"/>
+              </a:ext>
+            </a:extLst>
+          </p:cNvPr>
+          <p:cNvSpPr/>
+          <p:nvPr/>
+        </p:nvSpPr>
+        <p:spPr>
+          <a:xfrm>
+            <a:off x="10791630" y="533912"/>
+            <a:ext cx="1082547" cy="521638"/>
+          </a:xfrm>
+          <a:custGeom>
+            <a:avLst/>
+            <a:gdLst>
+              <a:gd name="csX0" fmla="*/ 346535 w 1082547"/>
+              <a:gd name="csY0" fmla="*/ 0 h 521638"/>
+              <a:gd name="csX1" fmla="*/ 995606 w 1082547"/>
+              <a:gd name="csY1" fmla="*/ 0 h 521638"/>
+              <a:gd name="csX2" fmla="*/ 1082547 w 1082547"/>
+              <a:gd name="csY2" fmla="*/ 86941 h 521638"/>
+              <a:gd name="csX3" fmla="*/ 1082547 w 1082547"/>
+              <a:gd name="csY3" fmla="*/ 434697 h 521638"/>
+              <a:gd name="csX4" fmla="*/ 995606 w 1082547"/>
+              <a:gd name="csY4" fmla="*/ 521638 h 521638"/>
+              <a:gd name="csX5" fmla="*/ 0 w 1082547"/>
+              <a:gd name="csY5" fmla="*/ 521638 h 521638"/>
+            </a:gdLst>
+            <a:ahLst/>
+            <a:cxnLst>
+              <a:cxn ang="0">
+                <a:pos x="csX0" y="csY0"/>
+              </a:cxn>
+              <a:cxn ang="0">
+                <a:pos x="csX1" y="csY1"/>
+              </a:cxn>
+              <a:cxn ang="0">
+                <a:pos x="csX2" y="csY2"/>
+              </a:cxn>
+              <a:cxn ang="0">
+                <a:pos x="csX3" y="csY3"/>
+              </a:cxn>
+              <a:cxn ang="0">
+                <a:pos x="csX4" y="csY4"/>
+              </a:cxn>
+              <a:cxn ang="0">
+                <a:pos x="csX5" y="csY5"/>
+              </a:cxn>
+            </a:cxnLst>
+            <a:rect l="l" t="t" r="r" b="b"/>
+            <a:pathLst>
+              <a:path w="1082547" h="521638">
+                <a:moveTo>
+                  <a:pt x="346535" y="0"/>
+                </a:moveTo>
+                <a:lnTo>
+                  <a:pt x="995606" y="0"/>
+                </a:lnTo>
+                <a:cubicBezTo>
+                  <a:pt x="1043622" y="0"/>
+                  <a:pt x="1082547" y="38925"/>
+                  <a:pt x="1082547" y="86941"/>
+                </a:cubicBezTo>
+                <a:lnTo>
+                  <a:pt x="1082547" y="434697"/>
+                </a:lnTo>
+                <a:cubicBezTo>
+                  <a:pt x="1082547" y="482713"/>
+                  <a:pt x="1043622" y="521638"/>
+                  <a:pt x="995606" y="521638"/>
+                </a:cubicBezTo>
+                <a:lnTo>
+                  <a:pt x="0" y="521638"/>
+                </a:lnTo>
+                <a:close/>
+              </a:path>
+            </a:pathLst>
+          </a:custGeom>
+          <a:solidFill>
+            <a:srgbClr val="FD9A69"/>
+          </a:solidFill>
+          <a:ln>
+            <a:noFill/>
+          </a:ln>
+        </p:spPr>
+        <p:style>
+          <a:lnRef idx="2">
+            <a:schemeClr val="accent4">
+              <a:shade val="15000"/>
+            </a:schemeClr>
+          </a:lnRef>
+          <a:fillRef idx="1">
+            <a:schemeClr val="accent4"/>
+          </a:fillRef>
+          <a:effectRef idx="0">
+            <a:schemeClr val="accent4"/>
+          </a:effectRef>
+          <a:fontRef idx="minor">
+            <a:schemeClr val="lt1"/>
+          </a:fontRef>
+        </p:style>
+        <p:txBody>
+          <a:bodyPr wrap="square" rtlCol="0" anchor="ctr">
+            <a:noAutofit/>
+          </a:bodyPr>
+          <a:lstStyle/>
+          <a:p>
+            <a:pPr algn="ctr"/>
+            <a:endParaRPr lang="zh-CN" altLang="en-US"/>
+          </a:p>
+        </p:txBody>
+      </p:sp>
+      <p:sp>
+        <p:nvSpPr>
+          <p:cNvPr id="4" name="文本框 3">
+            <a:extLst>
+              <a:ext uri="{FF2B5EF4-FFF2-40B4-BE49-F238E27FC236}">
+                <a16:creationId xmlns:a16="http://schemas.microsoft.com/office/drawing/2014/main" id="{9774C3D6-8346-5B1B-80F8-F8F5999B5132}"/>
+              </a:ext>
+            </a:extLst>
+          </p:cNvPr>
+          <p:cNvSpPr txBox="1"/>
+          <p:nvPr/>
+        </p:nvSpPr>
+        <p:spPr>
+          <a:xfrm>
+            <a:off x="9418001" y="610065"/>
+            <a:ext cx="1386328" cy="369332"/>
+          </a:xfrm>
+          <a:prstGeom prst="rect">
+            <a:avLst/>
+          </a:prstGeom>
+          <a:noFill/>
+        </p:spPr>
+        <p:txBody>
+          <a:bodyPr wrap="square" rtlCol="0">
+            <a:spAutoFit/>
+          </a:bodyPr>
+          <a:lstStyle/>
+          <a:p>
+            <a:r>
+              <a:rPr lang="en-US" altLang="zh-CN" sz="900" b="1" dirty="0">
+                <a:solidFill>
+                  <a:schemeClr val="bg1"/>
+                </a:solidFill>
+                <a:latin typeface="Comic Sans MS" panose="030F0702030302020204" pitchFamily="66" charset="0"/>
+                <a:cs typeface="Times New Roman" panose="02020603050405020304" pitchFamily="18" charset="0"/>
+              </a:rPr>
+              <a:t>Paralysis:</a:t>
+            </a:r>
+          </a:p>
+          <a:p>
+            <a:r>
+              <a:rPr lang="en-US" altLang="zh-CN" sz="900" b="1" dirty="0">
+                <a:solidFill>
+                  <a:schemeClr val="bg1"/>
+                </a:solidFill>
+                <a:latin typeface="Comic Sans MS" panose="030F0702030302020204" pitchFamily="66" charset="0"/>
+                <a:cs typeface="Times New Roman" panose="02020603050405020304" pitchFamily="18" charset="0"/>
+              </a:rPr>
+              <a:t>1 or more </a:t>
+            </a:r>
+            <a:r>
+              <a:rPr lang="en-US" altLang="zh-CN" sz="900" b="1" dirty="0" err="1">
+                <a:solidFill>
+                  <a:schemeClr val="bg1"/>
+                </a:solidFill>
+                <a:latin typeface="Comic Sans MS" panose="030F0702030302020204" pitchFamily="66" charset="0"/>
+                <a:cs typeface="Times New Roman" panose="02020603050405020304" pitchFamily="18" charset="0"/>
+              </a:rPr>
+              <a:t>tims</a:t>
+            </a:r>
+            <a:endParaRPr lang="zh-CN" altLang="en-US" sz="900" b="1" dirty="0">
+              <a:solidFill>
+                <a:schemeClr val="bg1"/>
+              </a:solidFill>
+              <a:latin typeface="Comic Sans MS" panose="030F0702030302020204" pitchFamily="66" charset="0"/>
+              <a:cs typeface="Times New Roman" panose="02020603050405020304" pitchFamily="18" charset="0"/>
+            </a:endParaRPr>
+          </a:p>
+        </p:txBody>
+      </p:sp>
+      <p:sp>
+        <p:nvSpPr>
+          <p:cNvPr id="5" name="文本框 4">
+            <a:extLst>
+              <a:ext uri="{FF2B5EF4-FFF2-40B4-BE49-F238E27FC236}">
+                <a16:creationId xmlns:a16="http://schemas.microsoft.com/office/drawing/2014/main" id="{BD28DEDD-2345-FF68-7239-C249C2012D56}"/>
+              </a:ext>
+            </a:extLst>
+          </p:cNvPr>
+          <p:cNvSpPr txBox="1"/>
+          <p:nvPr/>
+        </p:nvSpPr>
+        <p:spPr>
+          <a:xfrm>
+            <a:off x="11102072" y="679315"/>
+            <a:ext cx="920537" cy="230832"/>
+          </a:xfrm>
+          <a:prstGeom prst="rect">
+            <a:avLst/>
+          </a:prstGeom>
+          <a:noFill/>
+        </p:spPr>
+        <p:txBody>
+          <a:bodyPr wrap="square" rtlCol="0">
+            <a:spAutoFit/>
+          </a:bodyPr>
+          <a:lstStyle/>
+          <a:p>
+            <a:r>
+              <a:rPr lang="en-US" altLang="zh-CN" sz="900" b="1" i="1" dirty="0">
+                <a:solidFill>
+                  <a:schemeClr val="bg1"/>
+                </a:solidFill>
+                <a:latin typeface="Comic Sans MS" panose="030F0702030302020204" pitchFamily="66" charset="0"/>
+                <a:cs typeface="Times New Roman" panose="02020603050405020304" pitchFamily="18" charset="0"/>
+              </a:rPr>
+              <a:t>0 or 1,000</a:t>
+            </a:r>
+            <a:endParaRPr lang="zh-CN" altLang="en-US" sz="900" b="1" i="1" dirty="0">
+              <a:solidFill>
+                <a:schemeClr val="bg1"/>
+              </a:solidFill>
+              <a:latin typeface="Comic Sans MS" panose="030F0702030302020204" pitchFamily="66" charset="0"/>
+              <a:cs typeface="Times New Roman" panose="02020603050405020304" pitchFamily="18" charset="0"/>
+            </a:endParaRPr>
+          </a:p>
+        </p:txBody>
+      </p:sp>
+      <p:sp>
+        <p:nvSpPr>
+          <p:cNvPr id="6" name="任意多边形: 形状 5">
+            <a:extLst>
+              <a:ext uri="{FF2B5EF4-FFF2-40B4-BE49-F238E27FC236}">
+                <a16:creationId xmlns:a16="http://schemas.microsoft.com/office/drawing/2014/main" id="{6EDAD5D5-6CCE-663F-67B9-7429D3D8056D}"/>
+              </a:ext>
+            </a:extLst>
+          </p:cNvPr>
+          <p:cNvSpPr/>
+          <p:nvPr/>
+        </p:nvSpPr>
+        <p:spPr>
+          <a:xfrm>
+            <a:off x="9404660" y="1124800"/>
+            <a:ext cx="1859903" cy="521638"/>
+          </a:xfrm>
+          <a:custGeom>
+            <a:avLst/>
+            <a:gdLst>
+              <a:gd name="csX0" fmla="*/ 86941 w 1405771"/>
+              <a:gd name="csY0" fmla="*/ 0 h 521638"/>
+              <a:gd name="csX1" fmla="*/ 1405771 w 1405771"/>
+              <a:gd name="csY1" fmla="*/ 0 h 521638"/>
+              <a:gd name="csX2" fmla="*/ 1059236 w 1405771"/>
+              <a:gd name="csY2" fmla="*/ 521638 h 521638"/>
+              <a:gd name="csX3" fmla="*/ 86941 w 1405771"/>
+              <a:gd name="csY3" fmla="*/ 521638 h 521638"/>
+              <a:gd name="csX4" fmla="*/ 0 w 1405771"/>
+              <a:gd name="csY4" fmla="*/ 434697 h 521638"/>
+              <a:gd name="csX5" fmla="*/ 0 w 1405771"/>
+              <a:gd name="csY5" fmla="*/ 86941 h 521638"/>
+              <a:gd name="csX6" fmla="*/ 86941 w 1405771"/>
+              <a:gd name="csY6" fmla="*/ 0 h 521638"/>
+            </a:gdLst>
+            <a:ahLst/>
+            <a:cxnLst>
+              <a:cxn ang="0">
+                <a:pos x="csX0" y="csY0"/>
+              </a:cxn>
+              <a:cxn ang="0">
+                <a:pos x="csX1" y="csY1"/>
+              </a:cxn>
+              <a:cxn ang="0">
+                <a:pos x="csX2" y="csY2"/>
+              </a:cxn>
+              <a:cxn ang="0">
+                <a:pos x="csX3" y="csY3"/>
+              </a:cxn>
+              <a:cxn ang="0">
+                <a:pos x="csX4" y="csY4"/>
+              </a:cxn>
+              <a:cxn ang="0">
+                <a:pos x="csX5" y="csY5"/>
+              </a:cxn>
+              <a:cxn ang="0">
+                <a:pos x="csX6" y="csY6"/>
+              </a:cxn>
+            </a:cxnLst>
+            <a:rect l="l" t="t" r="r" b="b"/>
+            <a:pathLst>
+              <a:path w="1405771" h="521638">
+                <a:moveTo>
+                  <a:pt x="86941" y="0"/>
+                </a:moveTo>
+                <a:lnTo>
+                  <a:pt x="1405771" y="0"/>
+                </a:lnTo>
+                <a:lnTo>
+                  <a:pt x="1059236" y="521638"/>
+                </a:lnTo>
+                <a:lnTo>
+                  <a:pt x="86941" y="521638"/>
+                </a:lnTo>
+                <a:cubicBezTo>
+                  <a:pt x="38925" y="521638"/>
+                  <a:pt x="0" y="482713"/>
+                  <a:pt x="0" y="434697"/>
+                </a:cubicBezTo>
+                <a:lnTo>
+                  <a:pt x="0" y="86941"/>
+                </a:lnTo>
+                <a:cubicBezTo>
+                  <a:pt x="0" y="38925"/>
+                  <a:pt x="38925" y="0"/>
+                  <a:pt x="86941" y="0"/>
+                </a:cubicBezTo>
+                <a:close/>
+              </a:path>
+            </a:pathLst>
+          </a:custGeom>
+          <a:solidFill>
+            <a:srgbClr val="D92727"/>
+          </a:solidFill>
+          <a:ln>
+            <a:noFill/>
+          </a:ln>
+        </p:spPr>
+        <p:style>
+          <a:lnRef idx="2">
+            <a:schemeClr val="accent4">
+              <a:shade val="15000"/>
+            </a:schemeClr>
+          </a:lnRef>
+          <a:fillRef idx="1">
+            <a:schemeClr val="accent4"/>
+          </a:fillRef>
+          <a:effectRef idx="0">
+            <a:schemeClr val="accent4"/>
+          </a:effectRef>
+          <a:fontRef idx="minor">
+            <a:schemeClr val="lt1"/>
+          </a:fontRef>
+        </p:style>
+        <p:txBody>
+          <a:bodyPr wrap="square" rtlCol="0" anchor="ctr">
+            <a:noAutofit/>
+          </a:bodyPr>
+          <a:lstStyle/>
+          <a:p>
+            <a:pPr algn="ctr"/>
+            <a:endParaRPr lang="zh-CN" altLang="en-US" dirty="0"/>
+          </a:p>
+        </p:txBody>
+      </p:sp>
+      <p:sp>
+        <p:nvSpPr>
+          <p:cNvPr id="7" name="任意多边形: 形状 6">
+            <a:extLst>
+              <a:ext uri="{FF2B5EF4-FFF2-40B4-BE49-F238E27FC236}">
+                <a16:creationId xmlns:a16="http://schemas.microsoft.com/office/drawing/2014/main" id="{DDC47C23-1D74-B166-96A3-D2F487F05F56}"/>
+              </a:ext>
+            </a:extLst>
+          </p:cNvPr>
+          <p:cNvSpPr/>
+          <p:nvPr/>
+        </p:nvSpPr>
+        <p:spPr>
+          <a:xfrm>
+            <a:off x="10799977" y="1124800"/>
+            <a:ext cx="1082547" cy="521638"/>
+          </a:xfrm>
+          <a:custGeom>
+            <a:avLst/>
+            <a:gdLst>
+              <a:gd name="csX0" fmla="*/ 346535 w 1082547"/>
+              <a:gd name="csY0" fmla="*/ 0 h 521638"/>
+              <a:gd name="csX1" fmla="*/ 995606 w 1082547"/>
+              <a:gd name="csY1" fmla="*/ 0 h 521638"/>
+              <a:gd name="csX2" fmla="*/ 1082547 w 1082547"/>
+              <a:gd name="csY2" fmla="*/ 86941 h 521638"/>
+              <a:gd name="csX3" fmla="*/ 1082547 w 1082547"/>
+              <a:gd name="csY3" fmla="*/ 434697 h 521638"/>
+              <a:gd name="csX4" fmla="*/ 995606 w 1082547"/>
+              <a:gd name="csY4" fmla="*/ 521638 h 521638"/>
+              <a:gd name="csX5" fmla="*/ 0 w 1082547"/>
+              <a:gd name="csY5" fmla="*/ 521638 h 521638"/>
+            </a:gdLst>
+            <a:ahLst/>
+            <a:cxnLst>
+              <a:cxn ang="0">
+                <a:pos x="csX0" y="csY0"/>
+              </a:cxn>
+              <a:cxn ang="0">
+                <a:pos x="csX1" y="csY1"/>
+              </a:cxn>
+              <a:cxn ang="0">
+                <a:pos x="csX2" y="csY2"/>
+              </a:cxn>
+              <a:cxn ang="0">
+                <a:pos x="csX3" y="csY3"/>
+              </a:cxn>
+              <a:cxn ang="0">
+                <a:pos x="csX4" y="csY4"/>
+              </a:cxn>
+              <a:cxn ang="0">
+                <a:pos x="csX5" y="csY5"/>
+              </a:cxn>
+            </a:cxnLst>
+            <a:rect l="l" t="t" r="r" b="b"/>
+            <a:pathLst>
+              <a:path w="1082547" h="521638">
+                <a:moveTo>
+                  <a:pt x="346535" y="0"/>
+                </a:moveTo>
+                <a:lnTo>
+                  <a:pt x="995606" y="0"/>
+                </a:lnTo>
+                <a:cubicBezTo>
+                  <a:pt x="1043622" y="0"/>
+                  <a:pt x="1082547" y="38925"/>
+                  <a:pt x="1082547" y="86941"/>
+                </a:cubicBezTo>
+                <a:lnTo>
+                  <a:pt x="1082547" y="434697"/>
+                </a:lnTo>
+                <a:cubicBezTo>
+                  <a:pt x="1082547" y="482713"/>
+                  <a:pt x="1043622" y="521638"/>
+                  <a:pt x="995606" y="521638"/>
+                </a:cubicBezTo>
+                <a:lnTo>
+                  <a:pt x="0" y="521638"/>
+                </a:lnTo>
+                <a:close/>
+              </a:path>
+            </a:pathLst>
+          </a:custGeom>
+          <a:solidFill>
+            <a:srgbClr val="FD9A69"/>
+          </a:solidFill>
+          <a:ln>
+            <a:noFill/>
+          </a:ln>
+        </p:spPr>
+        <p:style>
+          <a:lnRef idx="2">
+            <a:schemeClr val="accent4">
+              <a:shade val="15000"/>
+            </a:schemeClr>
+          </a:lnRef>
+          <a:fillRef idx="1">
+            <a:schemeClr val="accent4"/>
+          </a:fillRef>
+          <a:effectRef idx="0">
+            <a:schemeClr val="accent4"/>
+          </a:effectRef>
+          <a:fontRef idx="minor">
+            <a:schemeClr val="lt1"/>
+          </a:fontRef>
+        </p:style>
+        <p:txBody>
+          <a:bodyPr wrap="square" rtlCol="0" anchor="ctr">
+            <a:noAutofit/>
+          </a:bodyPr>
+          <a:lstStyle/>
+          <a:p>
+            <a:pPr algn="ctr"/>
+            <a:endParaRPr lang="zh-CN" altLang="en-US"/>
+          </a:p>
+        </p:txBody>
+      </p:sp>
+      <p:sp>
+        <p:nvSpPr>
+          <p:cNvPr id="8" name="文本框 7">
+            <a:extLst>
+              <a:ext uri="{FF2B5EF4-FFF2-40B4-BE49-F238E27FC236}">
+                <a16:creationId xmlns:a16="http://schemas.microsoft.com/office/drawing/2014/main" id="{EB6C1F8E-19F5-7EEB-E493-90DB0F4D7B31}"/>
+              </a:ext>
+            </a:extLst>
+          </p:cNvPr>
+          <p:cNvSpPr txBox="1"/>
+          <p:nvPr/>
+        </p:nvSpPr>
+        <p:spPr>
+          <a:xfrm>
+            <a:off x="9426348" y="1200953"/>
+            <a:ext cx="1386328" cy="369332"/>
+          </a:xfrm>
+          <a:prstGeom prst="rect">
+            <a:avLst/>
+          </a:prstGeom>
+          <a:noFill/>
+        </p:spPr>
+        <p:txBody>
+          <a:bodyPr wrap="square" rtlCol="0">
+            <a:spAutoFit/>
+          </a:bodyPr>
+          <a:lstStyle/>
+          <a:p>
+            <a:r>
+              <a:rPr lang="zh-CN" altLang="en-US" sz="900" b="1" dirty="0">
+                <a:solidFill>
+                  <a:schemeClr val="bg1"/>
+                </a:solidFill>
+                <a:latin typeface="Comic Sans MS" panose="030F0702030302020204" pitchFamily="66" charset="0"/>
+                <a:cs typeface="Times New Roman" panose="02020603050405020304" pitchFamily="18" charset="0"/>
+              </a:rPr>
+              <a:t>麻痹</a:t>
+            </a:r>
+            <a:endParaRPr lang="en-US" altLang="zh-CN" sz="900" b="1" dirty="0">
+              <a:solidFill>
+                <a:schemeClr val="bg1"/>
+              </a:solidFill>
+              <a:latin typeface="Comic Sans MS" panose="030F0702030302020204" pitchFamily="66" charset="0"/>
+              <a:cs typeface="Times New Roman" panose="02020603050405020304" pitchFamily="18" charset="0"/>
+            </a:endParaRPr>
+          </a:p>
+          <a:p>
+            <a:r>
+              <a:rPr lang="zh-CN" altLang="en-US" sz="900" b="1" dirty="0">
+                <a:solidFill>
+                  <a:schemeClr val="bg1"/>
+                </a:solidFill>
+                <a:latin typeface="Comic Sans MS" panose="030F0702030302020204" pitchFamily="66" charset="0"/>
+                <a:cs typeface="Times New Roman" panose="02020603050405020304" pitchFamily="18" charset="0"/>
+              </a:rPr>
+              <a:t>一次以上</a:t>
+            </a:r>
+          </a:p>
+        </p:txBody>
+      </p:sp>
+      <p:sp>
+        <p:nvSpPr>
+          <p:cNvPr id="9" name="文本框 8">
+            <a:extLst>
+              <a:ext uri="{FF2B5EF4-FFF2-40B4-BE49-F238E27FC236}">
+                <a16:creationId xmlns:a16="http://schemas.microsoft.com/office/drawing/2014/main" id="{9F1884F2-6E26-2950-D3F8-BACF3D279468}"/>
+              </a:ext>
+            </a:extLst>
+          </p:cNvPr>
+          <p:cNvSpPr txBox="1"/>
+          <p:nvPr/>
+        </p:nvSpPr>
+        <p:spPr>
+          <a:xfrm>
+            <a:off x="11110419" y="1270203"/>
+            <a:ext cx="920537" cy="230832"/>
+          </a:xfrm>
+          <a:prstGeom prst="rect">
+            <a:avLst/>
+          </a:prstGeom>
+          <a:noFill/>
+        </p:spPr>
+        <p:txBody>
+          <a:bodyPr wrap="square" rtlCol="0">
+            <a:spAutoFit/>
+          </a:bodyPr>
+          <a:lstStyle/>
+          <a:p>
+            <a:r>
+              <a:rPr lang="en-US" altLang="zh-CN" sz="900" b="1" i="1" dirty="0">
+                <a:solidFill>
+                  <a:schemeClr val="bg1"/>
+                </a:solidFill>
+                <a:latin typeface="Comic Sans MS" panose="030F0702030302020204" pitchFamily="66" charset="0"/>
+                <a:cs typeface="Times New Roman" panose="02020603050405020304" pitchFamily="18" charset="0"/>
+              </a:rPr>
+              <a:t>0 or 1,000</a:t>
+            </a:r>
+            <a:endParaRPr lang="zh-CN" altLang="en-US" sz="900" b="1" i="1" dirty="0">
+              <a:solidFill>
+                <a:schemeClr val="bg1"/>
+              </a:solidFill>
+              <a:latin typeface="Comic Sans MS" panose="030F0702030302020204" pitchFamily="66" charset="0"/>
+              <a:cs typeface="Times New Roman" panose="02020603050405020304" pitchFamily="18" charset="0"/>
+            </a:endParaRPr>
+          </a:p>
+        </p:txBody>
+      </p:sp>
+      <p:sp>
+        <p:nvSpPr>
+          <p:cNvPr id="13" name="任意多边形: 形状 12">
+            <a:extLst>
+              <a:ext uri="{FF2B5EF4-FFF2-40B4-BE49-F238E27FC236}">
+                <a16:creationId xmlns:a16="http://schemas.microsoft.com/office/drawing/2014/main" id="{9E2C211A-1B03-5624-FCE8-CF8762168837}"/>
+              </a:ext>
+            </a:extLst>
+          </p:cNvPr>
+          <p:cNvSpPr/>
+          <p:nvPr/>
+        </p:nvSpPr>
+        <p:spPr>
+          <a:xfrm>
+            <a:off x="9432386" y="1735015"/>
+            <a:ext cx="1859903" cy="521638"/>
+          </a:xfrm>
+          <a:custGeom>
+            <a:avLst/>
+            <a:gdLst>
+              <a:gd name="csX0" fmla="*/ 86941 w 1405771"/>
+              <a:gd name="csY0" fmla="*/ 0 h 521638"/>
+              <a:gd name="csX1" fmla="*/ 1405771 w 1405771"/>
+              <a:gd name="csY1" fmla="*/ 0 h 521638"/>
+              <a:gd name="csX2" fmla="*/ 1059236 w 1405771"/>
+              <a:gd name="csY2" fmla="*/ 521638 h 521638"/>
+              <a:gd name="csX3" fmla="*/ 86941 w 1405771"/>
+              <a:gd name="csY3" fmla="*/ 521638 h 521638"/>
+              <a:gd name="csX4" fmla="*/ 0 w 1405771"/>
+              <a:gd name="csY4" fmla="*/ 434697 h 521638"/>
+              <a:gd name="csX5" fmla="*/ 0 w 1405771"/>
+              <a:gd name="csY5" fmla="*/ 86941 h 521638"/>
+              <a:gd name="csX6" fmla="*/ 86941 w 1405771"/>
+              <a:gd name="csY6" fmla="*/ 0 h 521638"/>
+            </a:gdLst>
+            <a:ahLst/>
+            <a:cxnLst>
+              <a:cxn ang="0">
+                <a:pos x="csX0" y="csY0"/>
+              </a:cxn>
+              <a:cxn ang="0">
+                <a:pos x="csX1" y="csY1"/>
+              </a:cxn>
+              <a:cxn ang="0">
+                <a:pos x="csX2" y="csY2"/>
+              </a:cxn>
+              <a:cxn ang="0">
+                <a:pos x="csX3" y="csY3"/>
+              </a:cxn>
+              <a:cxn ang="0">
+                <a:pos x="csX4" y="csY4"/>
+              </a:cxn>
+              <a:cxn ang="0">
+                <a:pos x="csX5" y="csY5"/>
+              </a:cxn>
+              <a:cxn ang="0">
+                <a:pos x="csX6" y="csY6"/>
+              </a:cxn>
+            </a:cxnLst>
+            <a:rect l="l" t="t" r="r" b="b"/>
+            <a:pathLst>
+              <a:path w="1405771" h="521638">
+                <a:moveTo>
+                  <a:pt x="86941" y="0"/>
+                </a:moveTo>
+                <a:lnTo>
+                  <a:pt x="1405771" y="0"/>
+                </a:lnTo>
+                <a:lnTo>
+                  <a:pt x="1059236" y="521638"/>
+                </a:lnTo>
+                <a:lnTo>
+                  <a:pt x="86941" y="521638"/>
+                </a:lnTo>
+                <a:cubicBezTo>
+                  <a:pt x="38925" y="521638"/>
+                  <a:pt x="0" y="482713"/>
+                  <a:pt x="0" y="434697"/>
+                </a:cubicBezTo>
+                <a:lnTo>
+                  <a:pt x="0" y="86941"/>
+                </a:lnTo>
+                <a:cubicBezTo>
+                  <a:pt x="0" y="38925"/>
+                  <a:pt x="38925" y="0"/>
+                  <a:pt x="86941" y="0"/>
+                </a:cubicBezTo>
+                <a:close/>
+              </a:path>
+            </a:pathLst>
+          </a:custGeom>
+          <a:solidFill>
+            <a:srgbClr val="D92727"/>
+          </a:solidFill>
+          <a:ln>
+            <a:noFill/>
+          </a:ln>
+        </p:spPr>
+        <p:style>
+          <a:lnRef idx="2">
+            <a:schemeClr val="accent4">
+              <a:shade val="15000"/>
+            </a:schemeClr>
+          </a:lnRef>
+          <a:fillRef idx="1">
+            <a:schemeClr val="accent4"/>
+          </a:fillRef>
+          <a:effectRef idx="0">
+            <a:schemeClr val="accent4"/>
+          </a:effectRef>
+          <a:fontRef idx="minor">
+            <a:schemeClr val="lt1"/>
+          </a:fontRef>
+        </p:style>
+        <p:txBody>
+          <a:bodyPr wrap="square" rtlCol="0" anchor="ctr">
+            <a:noAutofit/>
+          </a:bodyPr>
+          <a:lstStyle/>
+          <a:p>
+            <a:pPr algn="ctr"/>
+            <a:endParaRPr lang="zh-CN" altLang="en-US" dirty="0"/>
+          </a:p>
+        </p:txBody>
+      </p:sp>
+      <p:sp>
+        <p:nvSpPr>
+          <p:cNvPr id="14" name="任意多边形: 形状 13">
+            <a:extLst>
+              <a:ext uri="{FF2B5EF4-FFF2-40B4-BE49-F238E27FC236}">
+                <a16:creationId xmlns:a16="http://schemas.microsoft.com/office/drawing/2014/main" id="{87F87B18-6696-0B37-E87A-4F6E0D06B177}"/>
+              </a:ext>
+            </a:extLst>
+          </p:cNvPr>
+          <p:cNvSpPr/>
+          <p:nvPr/>
+        </p:nvSpPr>
+        <p:spPr>
+          <a:xfrm>
+            <a:off x="10827703" y="1733699"/>
+            <a:ext cx="1082547" cy="521638"/>
+          </a:xfrm>
+          <a:custGeom>
+            <a:avLst/>
+            <a:gdLst>
+              <a:gd name="csX0" fmla="*/ 346535 w 1082547"/>
+              <a:gd name="csY0" fmla="*/ 0 h 521638"/>
+              <a:gd name="csX1" fmla="*/ 995606 w 1082547"/>
+              <a:gd name="csY1" fmla="*/ 0 h 521638"/>
+              <a:gd name="csX2" fmla="*/ 1082547 w 1082547"/>
+              <a:gd name="csY2" fmla="*/ 86941 h 521638"/>
+              <a:gd name="csX3" fmla="*/ 1082547 w 1082547"/>
+              <a:gd name="csY3" fmla="*/ 434697 h 521638"/>
+              <a:gd name="csX4" fmla="*/ 995606 w 1082547"/>
+              <a:gd name="csY4" fmla="*/ 521638 h 521638"/>
+              <a:gd name="csX5" fmla="*/ 0 w 1082547"/>
+              <a:gd name="csY5" fmla="*/ 521638 h 521638"/>
+            </a:gdLst>
+            <a:ahLst/>
+            <a:cxnLst>
+              <a:cxn ang="0">
+                <a:pos x="csX0" y="csY0"/>
+              </a:cxn>
+              <a:cxn ang="0">
+                <a:pos x="csX1" y="csY1"/>
+              </a:cxn>
+              <a:cxn ang="0">
+                <a:pos x="csX2" y="csY2"/>
+              </a:cxn>
+              <a:cxn ang="0">
+                <a:pos x="csX3" y="csY3"/>
+              </a:cxn>
+              <a:cxn ang="0">
+                <a:pos x="csX4" y="csY4"/>
+              </a:cxn>
+              <a:cxn ang="0">
+                <a:pos x="csX5" y="csY5"/>
+              </a:cxn>
+            </a:cxnLst>
+            <a:rect l="l" t="t" r="r" b="b"/>
+            <a:pathLst>
+              <a:path w="1082547" h="521638">
+                <a:moveTo>
+                  <a:pt x="346535" y="0"/>
+                </a:moveTo>
+                <a:lnTo>
+                  <a:pt x="995606" y="0"/>
+                </a:lnTo>
+                <a:cubicBezTo>
+                  <a:pt x="1043622" y="0"/>
+                  <a:pt x="1082547" y="38925"/>
+                  <a:pt x="1082547" y="86941"/>
+                </a:cubicBezTo>
+                <a:lnTo>
+                  <a:pt x="1082547" y="434697"/>
+                </a:lnTo>
+                <a:cubicBezTo>
+                  <a:pt x="1082547" y="482713"/>
+                  <a:pt x="1043622" y="521638"/>
+                  <a:pt x="995606" y="521638"/>
+                </a:cubicBezTo>
+                <a:lnTo>
+                  <a:pt x="0" y="521638"/>
+                </a:lnTo>
+                <a:close/>
+              </a:path>
+            </a:pathLst>
+          </a:custGeom>
+          <a:solidFill>
+            <a:srgbClr val="FD9A69"/>
+          </a:solidFill>
+          <a:ln>
+            <a:noFill/>
+          </a:ln>
+        </p:spPr>
+        <p:style>
+          <a:lnRef idx="2">
+            <a:schemeClr val="accent4">
+              <a:shade val="15000"/>
+            </a:schemeClr>
+          </a:lnRef>
+          <a:fillRef idx="1">
+            <a:schemeClr val="accent4"/>
+          </a:fillRef>
+          <a:effectRef idx="0">
+            <a:schemeClr val="accent4"/>
+          </a:effectRef>
+          <a:fontRef idx="minor">
+            <a:schemeClr val="lt1"/>
+          </a:fontRef>
+        </p:style>
+        <p:txBody>
+          <a:bodyPr wrap="square" rtlCol="0" anchor="ctr">
+            <a:noAutofit/>
+          </a:bodyPr>
+          <a:lstStyle/>
+          <a:p>
+            <a:pPr algn="ctr"/>
+            <a:endParaRPr lang="zh-CN" altLang="en-US"/>
+          </a:p>
+        </p:txBody>
+      </p:sp>
+      <p:sp>
+        <p:nvSpPr>
+          <p:cNvPr id="15" name="文本框 14">
+            <a:extLst>
+              <a:ext uri="{FF2B5EF4-FFF2-40B4-BE49-F238E27FC236}">
+                <a16:creationId xmlns:a16="http://schemas.microsoft.com/office/drawing/2014/main" id="{5E2165E5-BEB2-C4B0-B644-4A2BE018F52E}"/>
+              </a:ext>
+            </a:extLst>
+          </p:cNvPr>
+          <p:cNvSpPr txBox="1"/>
+          <p:nvPr/>
+        </p:nvSpPr>
+        <p:spPr>
+          <a:xfrm>
+            <a:off x="9454074" y="1809852"/>
+            <a:ext cx="1386328" cy="369332"/>
+          </a:xfrm>
+          <a:prstGeom prst="rect">
+            <a:avLst/>
+          </a:prstGeom>
+          <a:noFill/>
+        </p:spPr>
+        <p:txBody>
+          <a:bodyPr wrap="square" rtlCol="0">
+            <a:spAutoFit/>
+          </a:bodyPr>
+          <a:lstStyle/>
+          <a:p>
+            <a:r>
+              <a:rPr lang="en-US" altLang="zh-CN" sz="900" b="1" dirty="0" err="1">
+                <a:solidFill>
+                  <a:schemeClr val="bg1"/>
+                </a:solidFill>
+                <a:latin typeface="Comic Sans MS" panose="030F0702030302020204" pitchFamily="66" charset="0"/>
+                <a:cs typeface="Times New Roman" panose="02020603050405020304" pitchFamily="18" charset="0"/>
+              </a:rPr>
+              <a:t>Sygna</a:t>
+            </a:r>
+            <a:r>
+              <a:rPr lang="en-US" altLang="zh-CN" sz="900" b="1" dirty="0">
+                <a:solidFill>
+                  <a:schemeClr val="bg1"/>
+                </a:solidFill>
+                <a:latin typeface="Comic Sans MS" panose="030F0702030302020204" pitchFamily="66" charset="0"/>
+                <a:cs typeface="Times New Roman" panose="02020603050405020304" pitchFamily="18" charset="0"/>
+              </a:rPr>
+              <a:t> Suit </a:t>
+            </a:r>
+          </a:p>
+          <a:p>
+            <a:r>
+              <a:rPr lang="en-US" altLang="zh-CN" sz="900" b="1" dirty="0">
+                <a:solidFill>
+                  <a:schemeClr val="bg1"/>
+                </a:solidFill>
+                <a:latin typeface="Comic Sans MS" panose="030F0702030302020204" pitchFamily="66" charset="0"/>
+                <a:cs typeface="Times New Roman" panose="02020603050405020304" pitchFamily="18" charset="0"/>
+              </a:rPr>
+              <a:t>or </a:t>
+            </a:r>
+            <a:r>
+              <a:rPr lang="en-US" altLang="zh-CN" sz="900" b="1" dirty="0" err="1">
+                <a:solidFill>
+                  <a:schemeClr val="bg1"/>
+                </a:solidFill>
+                <a:latin typeface="Comic Sans MS" panose="030F0702030302020204" pitchFamily="66" charset="0"/>
+                <a:cs typeface="Times New Roman" panose="02020603050405020304" pitchFamily="18" charset="0"/>
+              </a:rPr>
+              <a:t>Unova</a:t>
+            </a:r>
+            <a:endParaRPr lang="en-US" altLang="zh-CN" sz="900" b="1" dirty="0">
+              <a:solidFill>
+                <a:schemeClr val="bg1"/>
+              </a:solidFill>
+              <a:latin typeface="Comic Sans MS" panose="030F0702030302020204" pitchFamily="66" charset="0"/>
+              <a:cs typeface="Times New Roman" panose="02020603050405020304" pitchFamily="18" charset="0"/>
+            </a:endParaRPr>
+          </a:p>
+        </p:txBody>
+      </p:sp>
+      <p:sp>
+        <p:nvSpPr>
+          <p:cNvPr id="16" name="文本框 15">
+            <a:extLst>
+              <a:ext uri="{FF2B5EF4-FFF2-40B4-BE49-F238E27FC236}">
+                <a16:creationId xmlns:a16="http://schemas.microsoft.com/office/drawing/2014/main" id="{8ACF8BEA-4D4E-BCF1-9BA6-AA73BB975C1F}"/>
+              </a:ext>
+            </a:extLst>
+          </p:cNvPr>
+          <p:cNvSpPr txBox="1"/>
+          <p:nvPr/>
+        </p:nvSpPr>
+        <p:spPr>
+          <a:xfrm>
+            <a:off x="11138145" y="1879102"/>
+            <a:ext cx="920537" cy="230832"/>
+          </a:xfrm>
+          <a:prstGeom prst="rect">
+            <a:avLst/>
+          </a:prstGeom>
+          <a:noFill/>
+        </p:spPr>
+        <p:txBody>
+          <a:bodyPr wrap="square" rtlCol="0">
+            <a:spAutoFit/>
+          </a:bodyPr>
+          <a:lstStyle/>
+          <a:p>
+            <a:r>
+              <a:rPr lang="en-US" altLang="zh-CN" sz="900" b="1" i="1" dirty="0">
+                <a:solidFill>
+                  <a:schemeClr val="bg1"/>
+                </a:solidFill>
+                <a:latin typeface="Comic Sans MS" panose="030F0702030302020204" pitchFamily="66" charset="0"/>
+                <a:cs typeface="Times New Roman" panose="02020603050405020304" pitchFamily="18" charset="0"/>
+              </a:rPr>
+              <a:t>0 or 1,000</a:t>
+            </a:r>
+            <a:endParaRPr lang="zh-CN" altLang="en-US" sz="900" b="1" i="1" dirty="0">
+              <a:solidFill>
+                <a:schemeClr val="bg1"/>
+              </a:solidFill>
+              <a:latin typeface="Comic Sans MS" panose="030F0702030302020204" pitchFamily="66" charset="0"/>
+              <a:cs typeface="Times New Roman" panose="02020603050405020304" pitchFamily="18" charset="0"/>
+            </a:endParaRPr>
+          </a:p>
+        </p:txBody>
+      </p:sp>
+      <p:sp>
+        <p:nvSpPr>
+          <p:cNvPr id="17" name="任意多边形: 形状 16">
+            <a:extLst>
+              <a:ext uri="{FF2B5EF4-FFF2-40B4-BE49-F238E27FC236}">
+                <a16:creationId xmlns:a16="http://schemas.microsoft.com/office/drawing/2014/main" id="{0C8342AA-F7AB-BE9E-EABF-BDF237F7326C}"/>
+              </a:ext>
+            </a:extLst>
+          </p:cNvPr>
+          <p:cNvSpPr/>
+          <p:nvPr/>
+        </p:nvSpPr>
+        <p:spPr>
+          <a:xfrm>
+            <a:off x="9502921" y="2332602"/>
+            <a:ext cx="1859903" cy="521638"/>
+          </a:xfrm>
+          <a:custGeom>
+            <a:avLst/>
+            <a:gdLst>
+              <a:gd name="csX0" fmla="*/ 86941 w 1405771"/>
+              <a:gd name="csY0" fmla="*/ 0 h 521638"/>
+              <a:gd name="csX1" fmla="*/ 1405771 w 1405771"/>
+              <a:gd name="csY1" fmla="*/ 0 h 521638"/>
+              <a:gd name="csX2" fmla="*/ 1059236 w 1405771"/>
+              <a:gd name="csY2" fmla="*/ 521638 h 521638"/>
+              <a:gd name="csX3" fmla="*/ 86941 w 1405771"/>
+              <a:gd name="csY3" fmla="*/ 521638 h 521638"/>
+              <a:gd name="csX4" fmla="*/ 0 w 1405771"/>
+              <a:gd name="csY4" fmla="*/ 434697 h 521638"/>
+              <a:gd name="csX5" fmla="*/ 0 w 1405771"/>
+              <a:gd name="csY5" fmla="*/ 86941 h 521638"/>
+              <a:gd name="csX6" fmla="*/ 86941 w 1405771"/>
+              <a:gd name="csY6" fmla="*/ 0 h 521638"/>
+            </a:gdLst>
+            <a:ahLst/>
+            <a:cxnLst>
+              <a:cxn ang="0">
+                <a:pos x="csX0" y="csY0"/>
+              </a:cxn>
+              <a:cxn ang="0">
+                <a:pos x="csX1" y="csY1"/>
+              </a:cxn>
+              <a:cxn ang="0">
+                <a:pos x="csX2" y="csY2"/>
+              </a:cxn>
+              <a:cxn ang="0">
+                <a:pos x="csX3" y="csY3"/>
+              </a:cxn>
+              <a:cxn ang="0">
+                <a:pos x="csX4" y="csY4"/>
+              </a:cxn>
+              <a:cxn ang="0">
+                <a:pos x="csX5" y="csY5"/>
+              </a:cxn>
+              <a:cxn ang="0">
+                <a:pos x="csX6" y="csY6"/>
+              </a:cxn>
+            </a:cxnLst>
+            <a:rect l="l" t="t" r="r" b="b"/>
+            <a:pathLst>
+              <a:path w="1405771" h="521638">
+                <a:moveTo>
+                  <a:pt x="86941" y="0"/>
+                </a:moveTo>
+                <a:lnTo>
+                  <a:pt x="1405771" y="0"/>
+                </a:lnTo>
+                <a:lnTo>
+                  <a:pt x="1059236" y="521638"/>
+                </a:lnTo>
+                <a:lnTo>
+                  <a:pt x="86941" y="521638"/>
+                </a:lnTo>
+                <a:cubicBezTo>
+                  <a:pt x="38925" y="521638"/>
+                  <a:pt x="0" y="482713"/>
+                  <a:pt x="0" y="434697"/>
+                </a:cubicBezTo>
+                <a:lnTo>
+                  <a:pt x="0" y="86941"/>
+                </a:lnTo>
+                <a:cubicBezTo>
+                  <a:pt x="0" y="38925"/>
+                  <a:pt x="38925" y="0"/>
+                  <a:pt x="86941" y="0"/>
+                </a:cubicBezTo>
+                <a:close/>
+              </a:path>
+            </a:pathLst>
+          </a:custGeom>
+          <a:solidFill>
+            <a:srgbClr val="D92727"/>
+          </a:solidFill>
+          <a:ln>
+            <a:noFill/>
+          </a:ln>
+        </p:spPr>
+        <p:style>
+          <a:lnRef idx="2">
+            <a:schemeClr val="accent4">
+              <a:shade val="15000"/>
+            </a:schemeClr>
+          </a:lnRef>
+          <a:fillRef idx="1">
+            <a:schemeClr val="accent4"/>
+          </a:fillRef>
+          <a:effectRef idx="0">
+            <a:schemeClr val="accent4"/>
+          </a:effectRef>
+          <a:fontRef idx="minor">
+            <a:schemeClr val="lt1"/>
+          </a:fontRef>
+        </p:style>
+        <p:txBody>
+          <a:bodyPr wrap="square" rtlCol="0" anchor="ctr">
+            <a:noAutofit/>
+          </a:bodyPr>
+          <a:lstStyle/>
+          <a:p>
+            <a:pPr algn="ctr"/>
+            <a:endParaRPr lang="zh-CN" altLang="en-US" dirty="0"/>
+          </a:p>
+        </p:txBody>
+      </p:sp>
+      <p:sp>
+        <p:nvSpPr>
+          <p:cNvPr id="18" name="任意多边形: 形状 17">
+            <a:extLst>
+              <a:ext uri="{FF2B5EF4-FFF2-40B4-BE49-F238E27FC236}">
+                <a16:creationId xmlns:a16="http://schemas.microsoft.com/office/drawing/2014/main" id="{42C22E4C-DE59-202D-4E50-9BE99119F13E}"/>
+              </a:ext>
+            </a:extLst>
+          </p:cNvPr>
+          <p:cNvSpPr/>
+          <p:nvPr/>
+        </p:nvSpPr>
+        <p:spPr>
+          <a:xfrm>
+            <a:off x="10898238" y="2331286"/>
+            <a:ext cx="1082547" cy="521638"/>
+          </a:xfrm>
+          <a:custGeom>
+            <a:avLst/>
+            <a:gdLst>
+              <a:gd name="csX0" fmla="*/ 346535 w 1082547"/>
+              <a:gd name="csY0" fmla="*/ 0 h 521638"/>
+              <a:gd name="csX1" fmla="*/ 995606 w 1082547"/>
+              <a:gd name="csY1" fmla="*/ 0 h 521638"/>
+              <a:gd name="csX2" fmla="*/ 1082547 w 1082547"/>
+              <a:gd name="csY2" fmla="*/ 86941 h 521638"/>
+              <a:gd name="csX3" fmla="*/ 1082547 w 1082547"/>
+              <a:gd name="csY3" fmla="*/ 434697 h 521638"/>
+              <a:gd name="csX4" fmla="*/ 995606 w 1082547"/>
+              <a:gd name="csY4" fmla="*/ 521638 h 521638"/>
+              <a:gd name="csX5" fmla="*/ 0 w 1082547"/>
+              <a:gd name="csY5" fmla="*/ 521638 h 521638"/>
+            </a:gdLst>
+            <a:ahLst/>
+            <a:cxnLst>
+              <a:cxn ang="0">
+                <a:pos x="csX0" y="csY0"/>
+              </a:cxn>
+              <a:cxn ang="0">
+                <a:pos x="csX1" y="csY1"/>
+              </a:cxn>
+              <a:cxn ang="0">
+                <a:pos x="csX2" y="csY2"/>
+              </a:cxn>
+              <a:cxn ang="0">
+                <a:pos x="csX3" y="csY3"/>
+              </a:cxn>
+              <a:cxn ang="0">
+                <a:pos x="csX4" y="csY4"/>
+              </a:cxn>
+              <a:cxn ang="0">
+                <a:pos x="csX5" y="csY5"/>
+              </a:cxn>
+            </a:cxnLst>
+            <a:rect l="l" t="t" r="r" b="b"/>
+            <a:pathLst>
+              <a:path w="1082547" h="521638">
+                <a:moveTo>
+                  <a:pt x="346535" y="0"/>
+                </a:moveTo>
+                <a:lnTo>
+                  <a:pt x="995606" y="0"/>
+                </a:lnTo>
+                <a:cubicBezTo>
+                  <a:pt x="1043622" y="0"/>
+                  <a:pt x="1082547" y="38925"/>
+                  <a:pt x="1082547" y="86941"/>
+                </a:cubicBezTo>
+                <a:lnTo>
+                  <a:pt x="1082547" y="434697"/>
+                </a:lnTo>
+                <a:cubicBezTo>
+                  <a:pt x="1082547" y="482713"/>
+                  <a:pt x="1043622" y="521638"/>
+                  <a:pt x="995606" y="521638"/>
+                </a:cubicBezTo>
+                <a:lnTo>
+                  <a:pt x="0" y="521638"/>
+                </a:lnTo>
+                <a:close/>
+              </a:path>
+            </a:pathLst>
+          </a:custGeom>
+          <a:solidFill>
+            <a:srgbClr val="FD9A69"/>
+          </a:solidFill>
+          <a:ln>
+            <a:noFill/>
+          </a:ln>
+        </p:spPr>
+        <p:style>
+          <a:lnRef idx="2">
+            <a:schemeClr val="accent4">
+              <a:shade val="15000"/>
+            </a:schemeClr>
+          </a:lnRef>
+          <a:fillRef idx="1">
+            <a:schemeClr val="accent4"/>
+          </a:fillRef>
+          <a:effectRef idx="0">
+            <a:schemeClr val="accent4"/>
+          </a:effectRef>
+          <a:fontRef idx="minor">
+            <a:schemeClr val="lt1"/>
+          </a:fontRef>
+        </p:style>
+        <p:txBody>
+          <a:bodyPr wrap="square" rtlCol="0" anchor="ctr">
+            <a:noAutofit/>
+          </a:bodyPr>
+          <a:lstStyle/>
+          <a:p>
+            <a:pPr algn="ctr"/>
+            <a:endParaRPr lang="zh-CN" altLang="en-US"/>
+          </a:p>
+        </p:txBody>
+      </p:sp>
+      <p:sp>
+        <p:nvSpPr>
+          <p:cNvPr id="19" name="文本框 18">
+            <a:extLst>
+              <a:ext uri="{FF2B5EF4-FFF2-40B4-BE49-F238E27FC236}">
+                <a16:creationId xmlns:a16="http://schemas.microsoft.com/office/drawing/2014/main" id="{E989D629-DAD2-D0F2-EB1A-408275AFFDED}"/>
+              </a:ext>
+            </a:extLst>
+          </p:cNvPr>
+          <p:cNvSpPr txBox="1"/>
+          <p:nvPr/>
+        </p:nvSpPr>
+        <p:spPr>
+          <a:xfrm>
+            <a:off x="9524609" y="2407439"/>
+            <a:ext cx="1386328" cy="369332"/>
+          </a:xfrm>
+          <a:prstGeom prst="rect">
+            <a:avLst/>
+          </a:prstGeom>
+          <a:noFill/>
+        </p:spPr>
+        <p:txBody>
+          <a:bodyPr wrap="square" rtlCol="0">
+            <a:spAutoFit/>
+          </a:bodyPr>
+          <a:lstStyle/>
+          <a:p>
+            <a:r>
+              <a:rPr lang="zh-CN" altLang="en-US" sz="900" b="1" dirty="0">
+                <a:solidFill>
+                  <a:schemeClr val="bg1"/>
+                </a:solidFill>
+                <a:latin typeface="Comic Sans MS" panose="030F0702030302020204" pitchFamily="66" charset="0"/>
+                <a:cs typeface="Times New Roman" panose="02020603050405020304" pitchFamily="18" charset="0"/>
+              </a:rPr>
+              <a:t>美极套装</a:t>
+            </a:r>
+            <a:endParaRPr lang="en-US" altLang="zh-CN" sz="900" b="1" dirty="0">
+              <a:solidFill>
+                <a:schemeClr val="bg1"/>
+              </a:solidFill>
+              <a:latin typeface="Comic Sans MS" panose="030F0702030302020204" pitchFamily="66" charset="0"/>
+              <a:cs typeface="Times New Roman" panose="02020603050405020304" pitchFamily="18" charset="0"/>
+            </a:endParaRPr>
+          </a:p>
+          <a:p>
+            <a:r>
+              <a:rPr lang="zh-CN" altLang="en-US" sz="900" b="1" dirty="0">
+                <a:solidFill>
+                  <a:schemeClr val="bg1"/>
+                </a:solidFill>
+                <a:latin typeface="Comic Sans MS" panose="030F0702030302020204" pitchFamily="66" charset="0"/>
+                <a:cs typeface="Times New Roman" panose="02020603050405020304" pitchFamily="18" charset="0"/>
+              </a:rPr>
+              <a:t>或合众</a:t>
+            </a:r>
+          </a:p>
+        </p:txBody>
+      </p:sp>
+      <p:sp>
+        <p:nvSpPr>
+          <p:cNvPr id="20" name="文本框 19">
+            <a:extLst>
+              <a:ext uri="{FF2B5EF4-FFF2-40B4-BE49-F238E27FC236}">
+                <a16:creationId xmlns:a16="http://schemas.microsoft.com/office/drawing/2014/main" id="{8B2C25ED-E1C3-9CEA-CD4F-F0225609EA01}"/>
+              </a:ext>
+            </a:extLst>
+          </p:cNvPr>
+          <p:cNvSpPr txBox="1"/>
+          <p:nvPr/>
+        </p:nvSpPr>
+        <p:spPr>
+          <a:xfrm>
+            <a:off x="11208680" y="2476689"/>
             <a:ext cx="920537" cy="230832"/>
           </a:xfrm>
           <a:prstGeom prst="rect">

--- a/icons.pptx
+++ b/icons.pptx
@@ -260,7 +260,7 @@
           <a:p>
             <a:fld id="{6D779CB0-7415-427D-B2A0-B916689A0D92}" type="datetimeFigureOut">
               <a:rPr lang="zh-CN" altLang="en-US" smtClean="0"/>
-              <a:t>2026/2/27</a:t>
+              <a:t>2026/4/24</a:t>
             </a:fld>
             <a:endParaRPr lang="zh-CN" altLang="en-US"/>
           </a:p>
@@ -458,7 +458,7 @@
           <a:p>
             <a:fld id="{6D779CB0-7415-427D-B2A0-B916689A0D92}" type="datetimeFigureOut">
               <a:rPr lang="zh-CN" altLang="en-US" smtClean="0"/>
-              <a:t>2026/2/27</a:t>
+              <a:t>2026/4/24</a:t>
             </a:fld>
             <a:endParaRPr lang="zh-CN" altLang="en-US"/>
           </a:p>
@@ -666,7 +666,7 @@
           <a:p>
             <a:fld id="{6D779CB0-7415-427D-B2A0-B916689A0D92}" type="datetimeFigureOut">
               <a:rPr lang="zh-CN" altLang="en-US" smtClean="0"/>
-              <a:t>2026/2/27</a:t>
+              <a:t>2026/4/24</a:t>
             </a:fld>
             <a:endParaRPr lang="zh-CN" altLang="en-US"/>
           </a:p>
@@ -864,7 +864,7 @@
           <a:p>
             <a:fld id="{6D779CB0-7415-427D-B2A0-B916689A0D92}" type="datetimeFigureOut">
               <a:rPr lang="zh-CN" altLang="en-US" smtClean="0"/>
-              <a:t>2026/2/27</a:t>
+              <a:t>2026/4/24</a:t>
             </a:fld>
             <a:endParaRPr lang="zh-CN" altLang="en-US"/>
           </a:p>
@@ -1139,7 +1139,7 @@
           <a:p>
             <a:fld id="{6D779CB0-7415-427D-B2A0-B916689A0D92}" type="datetimeFigureOut">
               <a:rPr lang="zh-CN" altLang="en-US" smtClean="0"/>
-              <a:t>2026/2/27</a:t>
+              <a:t>2026/4/24</a:t>
             </a:fld>
             <a:endParaRPr lang="zh-CN" altLang="en-US"/>
           </a:p>
@@ -1404,7 +1404,7 @@
           <a:p>
             <a:fld id="{6D779CB0-7415-427D-B2A0-B916689A0D92}" type="datetimeFigureOut">
               <a:rPr lang="zh-CN" altLang="en-US" smtClean="0"/>
-              <a:t>2026/2/27</a:t>
+              <a:t>2026/4/24</a:t>
             </a:fld>
             <a:endParaRPr lang="zh-CN" altLang="en-US"/>
           </a:p>
@@ -1816,7 +1816,7 @@
           <a:p>
             <a:fld id="{6D779CB0-7415-427D-B2A0-B916689A0D92}" type="datetimeFigureOut">
               <a:rPr lang="zh-CN" altLang="en-US" smtClean="0"/>
-              <a:t>2026/2/27</a:t>
+              <a:t>2026/4/24</a:t>
             </a:fld>
             <a:endParaRPr lang="zh-CN" altLang="en-US"/>
           </a:p>
@@ -1957,7 +1957,7 @@
           <a:p>
             <a:fld id="{6D779CB0-7415-427D-B2A0-B916689A0D92}" type="datetimeFigureOut">
               <a:rPr lang="zh-CN" altLang="en-US" smtClean="0"/>
-              <a:t>2026/2/27</a:t>
+              <a:t>2026/4/24</a:t>
             </a:fld>
             <a:endParaRPr lang="zh-CN" altLang="en-US"/>
           </a:p>
@@ -2070,7 +2070,7 @@
           <a:p>
             <a:fld id="{6D779CB0-7415-427D-B2A0-B916689A0D92}" type="datetimeFigureOut">
               <a:rPr lang="zh-CN" altLang="en-US" smtClean="0"/>
-              <a:t>2026/2/27</a:t>
+              <a:t>2026/4/24</a:t>
             </a:fld>
             <a:endParaRPr lang="zh-CN" altLang="en-US"/>
           </a:p>
@@ -2381,7 +2381,7 @@
           <a:p>
             <a:fld id="{6D779CB0-7415-427D-B2A0-B916689A0D92}" type="datetimeFigureOut">
               <a:rPr lang="zh-CN" altLang="en-US" smtClean="0"/>
-              <a:t>2026/2/27</a:t>
+              <a:t>2026/4/24</a:t>
             </a:fld>
             <a:endParaRPr lang="zh-CN" altLang="en-US"/>
           </a:p>
@@ -2669,7 +2669,7 @@
           <a:p>
             <a:fld id="{6D779CB0-7415-427D-B2A0-B916689A0D92}" type="datetimeFigureOut">
               <a:rPr lang="zh-CN" altLang="en-US" smtClean="0"/>
-              <a:t>2026/2/27</a:t>
+              <a:t>2026/4/24</a:t>
             </a:fld>
             <a:endParaRPr lang="zh-CN" altLang="en-US"/>
           </a:p>
@@ -2910,7 +2910,7 @@
           <a:p>
             <a:fld id="{6D779CB0-7415-427D-B2A0-B916689A0D92}" type="datetimeFigureOut">
               <a:rPr lang="zh-CN" altLang="en-US" smtClean="0"/>
-              <a:t>2026/2/27</a:t>
+              <a:t>2026/4/24</a:t>
             </a:fld>
             <a:endParaRPr lang="zh-CN" altLang="en-US"/>
           </a:p>
@@ -12203,6 +12203,706 @@
         <p:spPr>
           <a:xfrm>
             <a:off x="11208680" y="2476689"/>
+            <a:ext cx="920537" cy="230832"/>
+          </a:xfrm>
+          <a:prstGeom prst="rect">
+            <a:avLst/>
+          </a:prstGeom>
+          <a:noFill/>
+        </p:spPr>
+        <p:txBody>
+          <a:bodyPr wrap="square" rtlCol="0">
+            <a:spAutoFit/>
+          </a:bodyPr>
+          <a:lstStyle/>
+          <a:p>
+            <a:r>
+              <a:rPr lang="en-US" altLang="zh-CN" sz="900" b="1" i="1" dirty="0">
+                <a:solidFill>
+                  <a:schemeClr val="bg1"/>
+                </a:solidFill>
+                <a:latin typeface="Comic Sans MS" panose="030F0702030302020204" pitchFamily="66" charset="0"/>
+                <a:cs typeface="Times New Roman" panose="02020603050405020304" pitchFamily="18" charset="0"/>
+              </a:rPr>
+              <a:t>0 or 1,000</a:t>
+            </a:r>
+            <a:endParaRPr lang="zh-CN" altLang="en-US" sz="900" b="1" i="1" dirty="0">
+              <a:solidFill>
+                <a:schemeClr val="bg1"/>
+              </a:solidFill>
+              <a:latin typeface="Comic Sans MS" panose="030F0702030302020204" pitchFamily="66" charset="0"/>
+              <a:cs typeface="Times New Roman" panose="02020603050405020304" pitchFamily="18" charset="0"/>
+            </a:endParaRPr>
+          </a:p>
+        </p:txBody>
+      </p:sp>
+      <p:sp>
+        <p:nvSpPr>
+          <p:cNvPr id="22" name="任意多边形: 形状 21">
+            <a:extLst>
+              <a:ext uri="{FF2B5EF4-FFF2-40B4-BE49-F238E27FC236}">
+                <a16:creationId xmlns:a16="http://schemas.microsoft.com/office/drawing/2014/main" id="{34CEF1F4-6F5E-B4EF-16F6-8C30D1D55CC6}"/>
+              </a:ext>
+            </a:extLst>
+          </p:cNvPr>
+          <p:cNvSpPr/>
+          <p:nvPr/>
+        </p:nvSpPr>
+        <p:spPr>
+          <a:xfrm>
+            <a:off x="6629053" y="5657047"/>
+            <a:ext cx="1859903" cy="521638"/>
+          </a:xfrm>
+          <a:custGeom>
+            <a:avLst/>
+            <a:gdLst>
+              <a:gd name="csX0" fmla="*/ 86941 w 1405771"/>
+              <a:gd name="csY0" fmla="*/ 0 h 521638"/>
+              <a:gd name="csX1" fmla="*/ 1405771 w 1405771"/>
+              <a:gd name="csY1" fmla="*/ 0 h 521638"/>
+              <a:gd name="csX2" fmla="*/ 1059236 w 1405771"/>
+              <a:gd name="csY2" fmla="*/ 521638 h 521638"/>
+              <a:gd name="csX3" fmla="*/ 86941 w 1405771"/>
+              <a:gd name="csY3" fmla="*/ 521638 h 521638"/>
+              <a:gd name="csX4" fmla="*/ 0 w 1405771"/>
+              <a:gd name="csY4" fmla="*/ 434697 h 521638"/>
+              <a:gd name="csX5" fmla="*/ 0 w 1405771"/>
+              <a:gd name="csY5" fmla="*/ 86941 h 521638"/>
+              <a:gd name="csX6" fmla="*/ 86941 w 1405771"/>
+              <a:gd name="csY6" fmla="*/ 0 h 521638"/>
+            </a:gdLst>
+            <a:ahLst/>
+            <a:cxnLst>
+              <a:cxn ang="0">
+                <a:pos x="csX0" y="csY0"/>
+              </a:cxn>
+              <a:cxn ang="0">
+                <a:pos x="csX1" y="csY1"/>
+              </a:cxn>
+              <a:cxn ang="0">
+                <a:pos x="csX2" y="csY2"/>
+              </a:cxn>
+              <a:cxn ang="0">
+                <a:pos x="csX3" y="csY3"/>
+              </a:cxn>
+              <a:cxn ang="0">
+                <a:pos x="csX4" y="csY4"/>
+              </a:cxn>
+              <a:cxn ang="0">
+                <a:pos x="csX5" y="csY5"/>
+              </a:cxn>
+              <a:cxn ang="0">
+                <a:pos x="csX6" y="csY6"/>
+              </a:cxn>
+            </a:cxnLst>
+            <a:rect l="l" t="t" r="r" b="b"/>
+            <a:pathLst>
+              <a:path w="1405771" h="521638">
+                <a:moveTo>
+                  <a:pt x="86941" y="0"/>
+                </a:moveTo>
+                <a:lnTo>
+                  <a:pt x="1405771" y="0"/>
+                </a:lnTo>
+                <a:lnTo>
+                  <a:pt x="1059236" y="521638"/>
+                </a:lnTo>
+                <a:lnTo>
+                  <a:pt x="86941" y="521638"/>
+                </a:lnTo>
+                <a:cubicBezTo>
+                  <a:pt x="38925" y="521638"/>
+                  <a:pt x="0" y="482713"/>
+                  <a:pt x="0" y="434697"/>
+                </a:cubicBezTo>
+                <a:lnTo>
+                  <a:pt x="0" y="86941"/>
+                </a:lnTo>
+                <a:cubicBezTo>
+                  <a:pt x="0" y="38925"/>
+                  <a:pt x="38925" y="0"/>
+                  <a:pt x="86941" y="0"/>
+                </a:cubicBezTo>
+                <a:close/>
+              </a:path>
+            </a:pathLst>
+          </a:custGeom>
+          <a:solidFill>
+            <a:srgbClr val="D92727"/>
+          </a:solidFill>
+          <a:ln>
+            <a:noFill/>
+          </a:ln>
+        </p:spPr>
+        <p:style>
+          <a:lnRef idx="2">
+            <a:schemeClr val="accent4">
+              <a:shade val="15000"/>
+            </a:schemeClr>
+          </a:lnRef>
+          <a:fillRef idx="1">
+            <a:schemeClr val="accent4"/>
+          </a:fillRef>
+          <a:effectRef idx="0">
+            <a:schemeClr val="accent4"/>
+          </a:effectRef>
+          <a:fontRef idx="minor">
+            <a:schemeClr val="lt1"/>
+          </a:fontRef>
+        </p:style>
+        <p:txBody>
+          <a:bodyPr wrap="square" rtlCol="0" anchor="ctr">
+            <a:noAutofit/>
+          </a:bodyPr>
+          <a:lstStyle/>
+          <a:p>
+            <a:pPr algn="ctr"/>
+            <a:endParaRPr lang="zh-CN" altLang="en-US" dirty="0"/>
+          </a:p>
+        </p:txBody>
+      </p:sp>
+      <p:sp>
+        <p:nvSpPr>
+          <p:cNvPr id="23" name="任意多边形: 形状 22">
+            <a:extLst>
+              <a:ext uri="{FF2B5EF4-FFF2-40B4-BE49-F238E27FC236}">
+                <a16:creationId xmlns:a16="http://schemas.microsoft.com/office/drawing/2014/main" id="{90A72070-A6EB-1183-0741-36A6416F28AC}"/>
+              </a:ext>
+            </a:extLst>
+          </p:cNvPr>
+          <p:cNvSpPr/>
+          <p:nvPr/>
+        </p:nvSpPr>
+        <p:spPr>
+          <a:xfrm>
+            <a:off x="8024370" y="5655731"/>
+            <a:ext cx="1082547" cy="521638"/>
+          </a:xfrm>
+          <a:custGeom>
+            <a:avLst/>
+            <a:gdLst>
+              <a:gd name="csX0" fmla="*/ 346535 w 1082547"/>
+              <a:gd name="csY0" fmla="*/ 0 h 521638"/>
+              <a:gd name="csX1" fmla="*/ 995606 w 1082547"/>
+              <a:gd name="csY1" fmla="*/ 0 h 521638"/>
+              <a:gd name="csX2" fmla="*/ 1082547 w 1082547"/>
+              <a:gd name="csY2" fmla="*/ 86941 h 521638"/>
+              <a:gd name="csX3" fmla="*/ 1082547 w 1082547"/>
+              <a:gd name="csY3" fmla="*/ 434697 h 521638"/>
+              <a:gd name="csX4" fmla="*/ 995606 w 1082547"/>
+              <a:gd name="csY4" fmla="*/ 521638 h 521638"/>
+              <a:gd name="csX5" fmla="*/ 0 w 1082547"/>
+              <a:gd name="csY5" fmla="*/ 521638 h 521638"/>
+            </a:gdLst>
+            <a:ahLst/>
+            <a:cxnLst>
+              <a:cxn ang="0">
+                <a:pos x="csX0" y="csY0"/>
+              </a:cxn>
+              <a:cxn ang="0">
+                <a:pos x="csX1" y="csY1"/>
+              </a:cxn>
+              <a:cxn ang="0">
+                <a:pos x="csX2" y="csY2"/>
+              </a:cxn>
+              <a:cxn ang="0">
+                <a:pos x="csX3" y="csY3"/>
+              </a:cxn>
+              <a:cxn ang="0">
+                <a:pos x="csX4" y="csY4"/>
+              </a:cxn>
+              <a:cxn ang="0">
+                <a:pos x="csX5" y="csY5"/>
+              </a:cxn>
+            </a:cxnLst>
+            <a:rect l="l" t="t" r="r" b="b"/>
+            <a:pathLst>
+              <a:path w="1082547" h="521638">
+                <a:moveTo>
+                  <a:pt x="346535" y="0"/>
+                </a:moveTo>
+                <a:lnTo>
+                  <a:pt x="995606" y="0"/>
+                </a:lnTo>
+                <a:cubicBezTo>
+                  <a:pt x="1043622" y="0"/>
+                  <a:pt x="1082547" y="38925"/>
+                  <a:pt x="1082547" y="86941"/>
+                </a:cubicBezTo>
+                <a:lnTo>
+                  <a:pt x="1082547" y="434697"/>
+                </a:lnTo>
+                <a:cubicBezTo>
+                  <a:pt x="1082547" y="482713"/>
+                  <a:pt x="1043622" y="521638"/>
+                  <a:pt x="995606" y="521638"/>
+                </a:cubicBezTo>
+                <a:lnTo>
+                  <a:pt x="0" y="521638"/>
+                </a:lnTo>
+                <a:close/>
+              </a:path>
+            </a:pathLst>
+          </a:custGeom>
+          <a:solidFill>
+            <a:srgbClr val="FD9A69"/>
+          </a:solidFill>
+          <a:ln>
+            <a:noFill/>
+          </a:ln>
+        </p:spPr>
+        <p:style>
+          <a:lnRef idx="2">
+            <a:schemeClr val="accent4">
+              <a:shade val="15000"/>
+            </a:schemeClr>
+          </a:lnRef>
+          <a:fillRef idx="1">
+            <a:schemeClr val="accent4"/>
+          </a:fillRef>
+          <a:effectRef idx="0">
+            <a:schemeClr val="accent4"/>
+          </a:effectRef>
+          <a:fontRef idx="minor">
+            <a:schemeClr val="lt1"/>
+          </a:fontRef>
+        </p:style>
+        <p:txBody>
+          <a:bodyPr wrap="square" rtlCol="0" anchor="ctr">
+            <a:noAutofit/>
+          </a:bodyPr>
+          <a:lstStyle/>
+          <a:p>
+            <a:pPr algn="ctr"/>
+            <a:endParaRPr lang="zh-CN" altLang="en-US"/>
+          </a:p>
+        </p:txBody>
+      </p:sp>
+      <p:sp>
+        <p:nvSpPr>
+          <p:cNvPr id="26" name="文本框 25">
+            <a:extLst>
+              <a:ext uri="{FF2B5EF4-FFF2-40B4-BE49-F238E27FC236}">
+                <a16:creationId xmlns:a16="http://schemas.microsoft.com/office/drawing/2014/main" id="{F8D5195E-4EDB-087B-27C1-29F0C547E29A}"/>
+              </a:ext>
+            </a:extLst>
+          </p:cNvPr>
+          <p:cNvSpPr txBox="1"/>
+          <p:nvPr/>
+        </p:nvSpPr>
+        <p:spPr>
+          <a:xfrm>
+            <a:off x="6650741" y="5731884"/>
+            <a:ext cx="1386328" cy="369332"/>
+          </a:xfrm>
+          <a:prstGeom prst="rect">
+            <a:avLst/>
+          </a:prstGeom>
+          <a:noFill/>
+        </p:spPr>
+        <p:txBody>
+          <a:bodyPr wrap="square" rtlCol="0">
+            <a:spAutoFit/>
+          </a:bodyPr>
+          <a:lstStyle/>
+          <a:p>
+            <a:r>
+              <a:rPr lang="zh-CN" altLang="en-US" sz="900" b="1" dirty="0">
+                <a:solidFill>
+                  <a:schemeClr val="bg1"/>
+                </a:solidFill>
+                <a:latin typeface="Comic Sans MS" panose="030F0702030302020204" pitchFamily="66" charset="0"/>
+                <a:cs typeface="Times New Roman" panose="02020603050405020304" pitchFamily="18" charset="0"/>
+              </a:rPr>
+              <a:t>季节服装</a:t>
+            </a:r>
+          </a:p>
+          <a:p>
+            <a:r>
+              <a:rPr lang="zh-CN" altLang="en-US" sz="900" b="1" dirty="0">
+                <a:solidFill>
+                  <a:schemeClr val="bg1"/>
+                </a:solidFill>
+                <a:latin typeface="Comic Sans MS" panose="030F0702030302020204" pitchFamily="66" charset="0"/>
+                <a:cs typeface="Times New Roman" panose="02020603050405020304" pitchFamily="18" charset="0"/>
+              </a:rPr>
+              <a:t>或斗志昂扬</a:t>
+            </a:r>
+            <a:endParaRPr lang="en-US" altLang="zh-CN" sz="900" b="1" dirty="0">
+              <a:solidFill>
+                <a:schemeClr val="bg1"/>
+              </a:solidFill>
+              <a:latin typeface="Comic Sans MS" panose="030F0702030302020204" pitchFamily="66" charset="0"/>
+              <a:cs typeface="Times New Roman" panose="02020603050405020304" pitchFamily="18" charset="0"/>
+            </a:endParaRPr>
+          </a:p>
+        </p:txBody>
+      </p:sp>
+      <p:sp>
+        <p:nvSpPr>
+          <p:cNvPr id="27" name="文本框 26">
+            <a:extLst>
+              <a:ext uri="{FF2B5EF4-FFF2-40B4-BE49-F238E27FC236}">
+                <a16:creationId xmlns:a16="http://schemas.microsoft.com/office/drawing/2014/main" id="{8FC26397-0476-B038-9153-4F6C58A88BB7}"/>
+              </a:ext>
+            </a:extLst>
+          </p:cNvPr>
+          <p:cNvSpPr txBox="1"/>
+          <p:nvPr/>
+        </p:nvSpPr>
+        <p:spPr>
+          <a:xfrm>
+            <a:off x="8334812" y="5801134"/>
+            <a:ext cx="920537" cy="230832"/>
+          </a:xfrm>
+          <a:prstGeom prst="rect">
+            <a:avLst/>
+          </a:prstGeom>
+          <a:noFill/>
+        </p:spPr>
+        <p:txBody>
+          <a:bodyPr wrap="square" rtlCol="0">
+            <a:spAutoFit/>
+          </a:bodyPr>
+          <a:lstStyle/>
+          <a:p>
+            <a:r>
+              <a:rPr lang="en-US" altLang="zh-CN" sz="900" b="1" i="1" dirty="0">
+                <a:solidFill>
+                  <a:schemeClr val="bg1"/>
+                </a:solidFill>
+                <a:latin typeface="Comic Sans MS" panose="030F0702030302020204" pitchFamily="66" charset="0"/>
+                <a:cs typeface="Times New Roman" panose="02020603050405020304" pitchFamily="18" charset="0"/>
+              </a:rPr>
+              <a:t>0 or 1,000</a:t>
+            </a:r>
+            <a:endParaRPr lang="zh-CN" altLang="en-US" sz="900" b="1" i="1" dirty="0">
+              <a:solidFill>
+                <a:schemeClr val="bg1"/>
+              </a:solidFill>
+              <a:latin typeface="Comic Sans MS" panose="030F0702030302020204" pitchFamily="66" charset="0"/>
+              <a:cs typeface="Times New Roman" panose="02020603050405020304" pitchFamily="18" charset="0"/>
+            </a:endParaRPr>
+          </a:p>
+        </p:txBody>
+      </p:sp>
+      <p:sp>
+        <p:nvSpPr>
+          <p:cNvPr id="28" name="任意多边形: 形状 27">
+            <a:extLst>
+              <a:ext uri="{FF2B5EF4-FFF2-40B4-BE49-F238E27FC236}">
+                <a16:creationId xmlns:a16="http://schemas.microsoft.com/office/drawing/2014/main" id="{A6547FCF-5336-D4D5-EBBC-4541E55AFB8A}"/>
+              </a:ext>
+            </a:extLst>
+          </p:cNvPr>
+          <p:cNvSpPr/>
+          <p:nvPr/>
+        </p:nvSpPr>
+        <p:spPr>
+          <a:xfrm>
+            <a:off x="9383504" y="5660225"/>
+            <a:ext cx="1859903" cy="521638"/>
+          </a:xfrm>
+          <a:custGeom>
+            <a:avLst/>
+            <a:gdLst>
+              <a:gd name="csX0" fmla="*/ 86941 w 1405771"/>
+              <a:gd name="csY0" fmla="*/ 0 h 521638"/>
+              <a:gd name="csX1" fmla="*/ 1405771 w 1405771"/>
+              <a:gd name="csY1" fmla="*/ 0 h 521638"/>
+              <a:gd name="csX2" fmla="*/ 1059236 w 1405771"/>
+              <a:gd name="csY2" fmla="*/ 521638 h 521638"/>
+              <a:gd name="csX3" fmla="*/ 86941 w 1405771"/>
+              <a:gd name="csY3" fmla="*/ 521638 h 521638"/>
+              <a:gd name="csX4" fmla="*/ 0 w 1405771"/>
+              <a:gd name="csY4" fmla="*/ 434697 h 521638"/>
+              <a:gd name="csX5" fmla="*/ 0 w 1405771"/>
+              <a:gd name="csY5" fmla="*/ 86941 h 521638"/>
+              <a:gd name="csX6" fmla="*/ 86941 w 1405771"/>
+              <a:gd name="csY6" fmla="*/ 0 h 521638"/>
+            </a:gdLst>
+            <a:ahLst/>
+            <a:cxnLst>
+              <a:cxn ang="0">
+                <a:pos x="csX0" y="csY0"/>
+              </a:cxn>
+              <a:cxn ang="0">
+                <a:pos x="csX1" y="csY1"/>
+              </a:cxn>
+              <a:cxn ang="0">
+                <a:pos x="csX2" y="csY2"/>
+              </a:cxn>
+              <a:cxn ang="0">
+                <a:pos x="csX3" y="csY3"/>
+              </a:cxn>
+              <a:cxn ang="0">
+                <a:pos x="csX4" y="csY4"/>
+              </a:cxn>
+              <a:cxn ang="0">
+                <a:pos x="csX5" y="csY5"/>
+              </a:cxn>
+              <a:cxn ang="0">
+                <a:pos x="csX6" y="csY6"/>
+              </a:cxn>
+            </a:cxnLst>
+            <a:rect l="l" t="t" r="r" b="b"/>
+            <a:pathLst>
+              <a:path w="1405771" h="521638">
+                <a:moveTo>
+                  <a:pt x="86941" y="0"/>
+                </a:moveTo>
+                <a:lnTo>
+                  <a:pt x="1405771" y="0"/>
+                </a:lnTo>
+                <a:lnTo>
+                  <a:pt x="1059236" y="521638"/>
+                </a:lnTo>
+                <a:lnTo>
+                  <a:pt x="86941" y="521638"/>
+                </a:lnTo>
+                <a:cubicBezTo>
+                  <a:pt x="38925" y="521638"/>
+                  <a:pt x="0" y="482713"/>
+                  <a:pt x="0" y="434697"/>
+                </a:cubicBezTo>
+                <a:lnTo>
+                  <a:pt x="0" y="86941"/>
+                </a:lnTo>
+                <a:cubicBezTo>
+                  <a:pt x="0" y="38925"/>
+                  <a:pt x="38925" y="0"/>
+                  <a:pt x="86941" y="0"/>
+                </a:cubicBezTo>
+                <a:close/>
+              </a:path>
+            </a:pathLst>
+          </a:custGeom>
+          <a:solidFill>
+            <a:srgbClr val="D92727"/>
+          </a:solidFill>
+          <a:ln>
+            <a:noFill/>
+          </a:ln>
+        </p:spPr>
+        <p:style>
+          <a:lnRef idx="2">
+            <a:schemeClr val="accent4">
+              <a:shade val="15000"/>
+            </a:schemeClr>
+          </a:lnRef>
+          <a:fillRef idx="1">
+            <a:schemeClr val="accent4"/>
+          </a:fillRef>
+          <a:effectRef idx="0">
+            <a:schemeClr val="accent4"/>
+          </a:effectRef>
+          <a:fontRef idx="minor">
+            <a:schemeClr val="lt1"/>
+          </a:fontRef>
+        </p:style>
+        <p:txBody>
+          <a:bodyPr wrap="square" rtlCol="0" anchor="ctr">
+            <a:noAutofit/>
+          </a:bodyPr>
+          <a:lstStyle/>
+          <a:p>
+            <a:pPr algn="ctr"/>
+            <a:endParaRPr lang="zh-CN" altLang="en-US" dirty="0"/>
+          </a:p>
+        </p:txBody>
+      </p:sp>
+      <p:sp>
+        <p:nvSpPr>
+          <p:cNvPr id="29" name="任意多边形: 形状 28">
+            <a:extLst>
+              <a:ext uri="{FF2B5EF4-FFF2-40B4-BE49-F238E27FC236}">
+                <a16:creationId xmlns:a16="http://schemas.microsoft.com/office/drawing/2014/main" id="{873DCD16-97D4-BAE6-88F0-6FE55D4EC210}"/>
+              </a:ext>
+            </a:extLst>
+          </p:cNvPr>
+          <p:cNvSpPr/>
+          <p:nvPr/>
+        </p:nvSpPr>
+        <p:spPr>
+          <a:xfrm>
+            <a:off x="10778821" y="5658909"/>
+            <a:ext cx="1082547" cy="521638"/>
+          </a:xfrm>
+          <a:custGeom>
+            <a:avLst/>
+            <a:gdLst>
+              <a:gd name="csX0" fmla="*/ 346535 w 1082547"/>
+              <a:gd name="csY0" fmla="*/ 0 h 521638"/>
+              <a:gd name="csX1" fmla="*/ 995606 w 1082547"/>
+              <a:gd name="csY1" fmla="*/ 0 h 521638"/>
+              <a:gd name="csX2" fmla="*/ 1082547 w 1082547"/>
+              <a:gd name="csY2" fmla="*/ 86941 h 521638"/>
+              <a:gd name="csX3" fmla="*/ 1082547 w 1082547"/>
+              <a:gd name="csY3" fmla="*/ 434697 h 521638"/>
+              <a:gd name="csX4" fmla="*/ 995606 w 1082547"/>
+              <a:gd name="csY4" fmla="*/ 521638 h 521638"/>
+              <a:gd name="csX5" fmla="*/ 0 w 1082547"/>
+              <a:gd name="csY5" fmla="*/ 521638 h 521638"/>
+            </a:gdLst>
+            <a:ahLst/>
+            <a:cxnLst>
+              <a:cxn ang="0">
+                <a:pos x="csX0" y="csY0"/>
+              </a:cxn>
+              <a:cxn ang="0">
+                <a:pos x="csX1" y="csY1"/>
+              </a:cxn>
+              <a:cxn ang="0">
+                <a:pos x="csX2" y="csY2"/>
+              </a:cxn>
+              <a:cxn ang="0">
+                <a:pos x="csX3" y="csY3"/>
+              </a:cxn>
+              <a:cxn ang="0">
+                <a:pos x="csX4" y="csY4"/>
+              </a:cxn>
+              <a:cxn ang="0">
+                <a:pos x="csX5" y="csY5"/>
+              </a:cxn>
+            </a:cxnLst>
+            <a:rect l="l" t="t" r="r" b="b"/>
+            <a:pathLst>
+              <a:path w="1082547" h="521638">
+                <a:moveTo>
+                  <a:pt x="346535" y="0"/>
+                </a:moveTo>
+                <a:lnTo>
+                  <a:pt x="995606" y="0"/>
+                </a:lnTo>
+                <a:cubicBezTo>
+                  <a:pt x="1043622" y="0"/>
+                  <a:pt x="1082547" y="38925"/>
+                  <a:pt x="1082547" y="86941"/>
+                </a:cubicBezTo>
+                <a:lnTo>
+                  <a:pt x="1082547" y="434697"/>
+                </a:lnTo>
+                <a:cubicBezTo>
+                  <a:pt x="1082547" y="482713"/>
+                  <a:pt x="1043622" y="521638"/>
+                  <a:pt x="995606" y="521638"/>
+                </a:cubicBezTo>
+                <a:lnTo>
+                  <a:pt x="0" y="521638"/>
+                </a:lnTo>
+                <a:close/>
+              </a:path>
+            </a:pathLst>
+          </a:custGeom>
+          <a:solidFill>
+            <a:srgbClr val="FD9A69"/>
+          </a:solidFill>
+          <a:ln>
+            <a:noFill/>
+          </a:ln>
+        </p:spPr>
+        <p:style>
+          <a:lnRef idx="2">
+            <a:schemeClr val="accent4">
+              <a:shade val="15000"/>
+            </a:schemeClr>
+          </a:lnRef>
+          <a:fillRef idx="1">
+            <a:schemeClr val="accent4"/>
+          </a:fillRef>
+          <a:effectRef idx="0">
+            <a:schemeClr val="accent4"/>
+          </a:effectRef>
+          <a:fontRef idx="minor">
+            <a:schemeClr val="lt1"/>
+          </a:fontRef>
+        </p:style>
+        <p:txBody>
+          <a:bodyPr wrap="square" rtlCol="0" anchor="ctr">
+            <a:noAutofit/>
+          </a:bodyPr>
+          <a:lstStyle/>
+          <a:p>
+            <a:pPr algn="ctr"/>
+            <a:endParaRPr lang="zh-CN" altLang="en-US"/>
+          </a:p>
+        </p:txBody>
+      </p:sp>
+      <p:sp>
+        <p:nvSpPr>
+          <p:cNvPr id="30" name="文本框 29">
+            <a:extLst>
+              <a:ext uri="{FF2B5EF4-FFF2-40B4-BE49-F238E27FC236}">
+                <a16:creationId xmlns:a16="http://schemas.microsoft.com/office/drawing/2014/main" id="{0AEADC7E-5C0A-34C1-C243-E2E9A6C5A47F}"/>
+              </a:ext>
+            </a:extLst>
+          </p:cNvPr>
+          <p:cNvSpPr txBox="1"/>
+          <p:nvPr/>
+        </p:nvSpPr>
+        <p:spPr>
+          <a:xfrm>
+            <a:off x="9405192" y="5735062"/>
+            <a:ext cx="1386328" cy="369332"/>
+          </a:xfrm>
+          <a:prstGeom prst="rect">
+            <a:avLst/>
+          </a:prstGeom>
+          <a:noFill/>
+        </p:spPr>
+        <p:txBody>
+          <a:bodyPr wrap="square" rtlCol="0">
+            <a:spAutoFit/>
+          </a:bodyPr>
+          <a:lstStyle/>
+          <a:p>
+            <a:r>
+              <a:rPr lang="en-US" altLang="zh-CN" sz="900" b="1" dirty="0">
+                <a:solidFill>
+                  <a:schemeClr val="bg1"/>
+                </a:solidFill>
+                <a:latin typeface="Comic Sans MS" panose="030F0702030302020204" pitchFamily="66" charset="0"/>
+                <a:cs typeface="Times New Roman" panose="02020603050405020304" pitchFamily="18" charset="0"/>
+              </a:rPr>
+              <a:t>Seasonal Outfit</a:t>
+            </a:r>
+            <a:endParaRPr lang="zh-CN" altLang="en-US" sz="900" b="1" dirty="0">
+              <a:solidFill>
+                <a:schemeClr val="bg1"/>
+              </a:solidFill>
+              <a:latin typeface="Comic Sans MS" panose="030F0702030302020204" pitchFamily="66" charset="0"/>
+              <a:cs typeface="Times New Roman" panose="02020603050405020304" pitchFamily="18" charset="0"/>
+            </a:endParaRPr>
+          </a:p>
+          <a:p>
+            <a:r>
+              <a:rPr lang="en-US" altLang="zh-CN" sz="900" b="1" dirty="0">
+                <a:solidFill>
+                  <a:schemeClr val="bg1"/>
+                </a:solidFill>
+                <a:latin typeface="Comic Sans MS" panose="030F0702030302020204" pitchFamily="66" charset="0"/>
+                <a:cs typeface="Times New Roman" panose="02020603050405020304" pitchFamily="18" charset="0"/>
+              </a:rPr>
+              <a:t>or Passionate Spirit</a:t>
+            </a:r>
+          </a:p>
+        </p:txBody>
+      </p:sp>
+      <p:sp>
+        <p:nvSpPr>
+          <p:cNvPr id="31" name="文本框 30">
+            <a:extLst>
+              <a:ext uri="{FF2B5EF4-FFF2-40B4-BE49-F238E27FC236}">
+                <a16:creationId xmlns:a16="http://schemas.microsoft.com/office/drawing/2014/main" id="{348A3CE8-1DE6-245D-60A6-214CE67ADF2A}"/>
+              </a:ext>
+            </a:extLst>
+          </p:cNvPr>
+          <p:cNvSpPr txBox="1"/>
+          <p:nvPr/>
+        </p:nvSpPr>
+        <p:spPr>
+          <a:xfrm>
+            <a:off x="11089263" y="5804312"/>
             <a:ext cx="920537" cy="230832"/>
           </a:xfrm>
           <a:prstGeom prst="rect">
